--- a/Course/slides_syntax_example.pptx
+++ b/Course/slides_syntax_example.pptx
@@ -3222,7 +3222,12 @@
             <p:ph idx="10" sz="half" type="dt"/>
           </p:nvPr>
         </p:nvSpPr>
-        <p:spPr/>
+        <p:spPr>
+          <a:xfrm>
+            <a:off x="457200" y="4767263"/>
+            <a:ext cx="2133600" cy="273844"/>
+          </a:xfrm>
+        </p:spPr>
         <p:txBody>
           <a:bodyPr/>
           <a:lstStyle/>
@@ -3269,7 +3274,12 @@
             <p:ph type="title"/>
           </p:nvPr>
         </p:nvSpPr>
-        <p:spPr/>
+        <p:spPr>
+          <a:xfrm>
+            <a:off x="457200" y="205979"/>
+            <a:ext cx="8229600" cy="857250"/>
+          </a:xfrm>
+        </p:spPr>
         <p:txBody>
           <a:bodyPr/>
           <a:lstStyle/>
@@ -3294,7 +3304,12 @@
             <p:ph idx="1"/>
           </p:nvPr>
         </p:nvSpPr>
-        <p:spPr/>
+        <p:spPr>
+          <a:xfrm>
+            <a:off x="457200" y="1200151"/>
+            <a:ext cx="8229600" cy="3394472"/>
+          </a:xfrm>
+        </p:spPr>
         <p:txBody>
           <a:bodyPr/>
           <a:lstStyle/>
@@ -3341,7 +3356,7 @@
 </file>
 
 <file path=ppt/slides/slide3.xml><?xml version="1.0" encoding="utf-8"?>
-<p:sld xmlns:a="http://schemas.openxmlformats.org/drawingml/2006/main" xmlns:r="http://schemas.openxmlformats.org/officeDocument/2006/relationships" xmlns:p="http://schemas.openxmlformats.org/presentationml/2006/main">
+<p:sld xmlns:a="http://schemas.openxmlformats.org/drawingml/2006/main" xmlns:r="http://schemas.openxmlformats.org/officeDocument/2006/relationships" xmlns:p="http://schemas.openxmlformats.org/presentationml/2006/main" xmlns:a14="http://schemas.microsoft.com/office/drawing/2010/main" xmlns:m="http://schemas.openxmlformats.org/officeDocument/2006/math" xmlns:mc="http://schemas.openxmlformats.org/markup-compatibility/2006">
   <p:cSld>
     <p:spTree>
       <p:nvGrpSpPr>
@@ -3367,7 +3382,12 @@
             <p:ph type="title"/>
           </p:nvPr>
         </p:nvSpPr>
-        <p:spPr/>
+        <p:spPr>
+          <a:xfrm>
+            <a:off x="457200" y="205979"/>
+            <a:ext cx="8229600" cy="857250"/>
+          </a:xfrm>
+        </p:spPr>
         <p:txBody>
           <a:bodyPr/>
           <a:lstStyle/>
@@ -3591,7 +3611,12 @@
             <p:ph type="title"/>
           </p:nvPr>
         </p:nvSpPr>
-        <p:spPr/>
+        <p:spPr>
+          <a:xfrm>
+            <a:off x="457200" y="205979"/>
+            <a:ext cx="8229600" cy="857250"/>
+          </a:xfrm>
+        </p:spPr>
         <p:txBody>
           <a:bodyPr/>
           <a:lstStyle/>
@@ -3672,7 +3697,7 @@
 </file>
 
 <file path=ppt/slides/slide5.xml><?xml version="1.0" encoding="utf-8"?>
-<p:sld xmlns:a="http://schemas.openxmlformats.org/drawingml/2006/main" xmlns:r="http://schemas.openxmlformats.org/officeDocument/2006/relationships" xmlns:p="http://schemas.openxmlformats.org/presentationml/2006/main">
+<p:sld xmlns:a="http://schemas.openxmlformats.org/drawingml/2006/main" xmlns:r="http://schemas.openxmlformats.org/officeDocument/2006/relationships" xmlns:p="http://schemas.openxmlformats.org/presentationml/2006/main" xmlns:a14="http://schemas.microsoft.com/office/drawing/2010/main" xmlns:m="http://schemas.openxmlformats.org/officeDocument/2006/math" xmlns:mc="http://schemas.openxmlformats.org/markup-compatibility/2006">
   <p:cSld>
     <p:spTree>
       <p:nvGrpSpPr>
@@ -3698,7 +3723,12 @@
             <p:ph type="title"/>
           </p:nvPr>
         </p:nvSpPr>
-        <p:spPr/>
+        <p:spPr>
+          <a:xfrm>
+            <a:off x="457200" y="205979"/>
+            <a:ext cx="8229600" cy="857250"/>
+          </a:xfrm>
+        </p:spPr>
         <p:txBody>
           <a:bodyPr/>
           <a:lstStyle/>
@@ -3958,7 +3988,345 @@
 </p:sld>
 </file>
 
-<file path=ppt/slides/slide6.xml><?xml version="1.0" encoding="UTF-8"?><p:sld xmlns:a="http://schemas.openxmlformats.org/drawingml/2006/main" xmlns:r="http://schemas.openxmlformats.org/officeDocument/2006/relationships" xmlns:p="http://schemas.openxmlformats.org/presentationml/2006/main"><p:cSld><p:spTree><p:nvGrpSpPr><p:cNvPr id="1" name="" /><p:cNvGrpSpPr /><p:nvPr /></p:nvGrpSpPr><p:grpSpPr><a:xfrm><a:off x="0" y="0" /><a:ext cx="0" cy="0" /><a:chOff x="0" y="0" /><a:chExt cx="0" cy="0" /></a:xfrm></p:grpSpPr><p:sp><p:nvSpPr><p:cNvPr id="2" name="Title 1" /><p:cNvSpPr><a:spLocks noGrp="1" /></p:cNvSpPr><p:nvPr><p:ph type="title" /></p:nvPr></p:nvSpPr><p:spPr /><p:txBody><a:bodyPr /><a:lstStyle /><a:p><a:pPr lvl="0" indent="0" marL="0"><a:buNone /></a:pPr><a:r><a:rPr /><a:t>Comparing the estimators</a:t></a:r></a:p></p:txBody></p:sp><p:graphicFrame><p:nvGraphicFramePr><p:cNvPr id="6" name="Content Placeholder 5" /><p:cNvGraphicFramePr><a:graphicFrameLocks noGrp="1" /></p:cNvGraphicFramePr><p:nvPr><p:ph idx="1" /></p:nvPr></p:nvGraphicFramePr><p:xfrm><a:off x="457200" y="1193800" /><a:ext cx="8229600" cy="3390900" /></p:xfrm><a:graphic><a:graphicData uri="http://schemas.openxmlformats.org/drawingml/2006/table"><a:tbl><a:tblPr firstRow="1" bandRow="1"><a:tableStyleId>{5C22544A-7EE6-4342-B048-85BDC9FD1C3A}</a:tableStyleId></a:tblPr><a:tblGrid><a:gridCol w="2057400" /><a:gridCol w="2057400" /><a:gridCol w="2057400" /><a:gridCol w="2057400" /></a:tblGrid><a:tr h="0"><a:tc><a:txBody><a:bodyPr /><a:lstStyle /><a:p><a:pPr lvl="0" indent="0" marL="0"><a:buNone /></a:pPr><a:r><a:rPr /><a:t>Method</a:t></a:r></a:p></a:txBody><a:tcPr /></a:tc><a:tc><a:txBody><a:bodyPr /><a:lstStyle /><a:p><a:pPr lvl="0" indent="0" marL="0"><a:buNone /></a:pPr><a:r><a:rPr /><a:t>Closed form</a:t></a:r></a:p></a:txBody><a:tcPr /></a:tc><a:tc><a:txBody><a:bodyPr /><a:lstStyle /><a:p><a:pPr lvl="0" indent="0" marL="0"><a:buNone /></a:pPr><a:r><a:rPr /><a:t>Scales to large </a:t></a:r><a14:m><m:oMath xmlns:m="http://schemas.openxmlformats.org/officeDocument/2006/math"><m:r><m:t>n</m:t></m:r></m:oMath></a14:m></a:p></a:txBody><a:tcPr /></a:tc><a:tc><a:txBody><a:bodyPr /><a:lstStyle /><a:p><a:pPr lvl="0" indent="0" marL="0"><a:buNone /></a:pPr><a:r><a:rPr /><a:t>Handles collinearity</a:t></a:r></a:p></a:txBody><a:tcPr /></a:tc></a:tr><a:tr h="0"><a:tc><a:txBody><a:bodyPr /><a:lstStyle /><a:p><a:pPr lvl="0" indent="0" marL="0"><a:buNone /></a:pPr><a:r><a:rPr /><a:t>Normal equation</a:t></a:r></a:p></a:txBody></a:tc><a:tc><a:txBody><a:bodyPr /><a:lstStyle /><a:p><a:pPr lvl="0" indent="0" marL="0"><a:buNone /></a:pPr><a:r><a:rPr /><a:t>Yes</a:t></a:r></a:p></a:txBody></a:tc><a:tc><a:txBody><a:bodyPr /><a:lstStyle /><a:p><a:pPr lvl="0" indent="0" marL="0"><a:buNone /></a:pPr><a:r><a:rPr /><a:t>No</a:t></a:r></a:p></a:txBody></a:tc><a:tc><a:txBody><a:bodyPr /><a:lstStyle /><a:p><a:pPr lvl="0" indent="0" marL="0"><a:buNone /></a:pPr><a:r><a:rPr /><a:t>No</a:t></a:r></a:p></a:txBody></a:tc></a:tr><a:tr h="0"><a:tc><a:txBody><a:bodyPr /><a:lstStyle /><a:p><a:pPr lvl="0" indent="0" marL="0"><a:buNone /></a:pPr><a:r><a:rPr /><a:t>Gradient descent</a:t></a:r></a:p></a:txBody></a:tc><a:tc><a:txBody><a:bodyPr /><a:lstStyle /><a:p><a:pPr lvl="0" indent="0" marL="0"><a:buNone /></a:pPr><a:r><a:rPr /><a:t>No</a:t></a:r></a:p></a:txBody></a:tc><a:tc><a:txBody><a:bodyPr /><a:lstStyle /><a:p><a:pPr lvl="0" indent="0" marL="0"><a:buNone /></a:pPr><a:r><a:rPr /><a:t>Yes</a:t></a:r></a:p></a:txBody></a:tc><a:tc><a:txBody><a:bodyPr /><a:lstStyle /><a:p><a:pPr lvl="0" indent="0" marL="0"><a:buNone /></a:pPr><a:r><a:rPr /><a:t>Partly</a:t></a:r></a:p></a:txBody></a:tc></a:tr><a:tr h="0"><a:tc><a:txBody><a:bodyPr /><a:lstStyle /><a:p><a:pPr lvl="0" indent="0" marL="0"><a:buNone /></a:pPr><a:r><a:rPr /><a:t>Ridge</a:t></a:r></a:p></a:txBody></a:tc><a:tc><a:txBody><a:bodyPr /><a:lstStyle /><a:p><a:pPr lvl="0" indent="0" marL="0"><a:buNone /></a:pPr><a:r><a:rPr /><a:t>Yes</a:t></a:r></a:p></a:txBody></a:tc><a:tc><a:txBody><a:bodyPr /><a:lstStyle /><a:p><a:pPr lvl="0" indent="0" marL="0"><a:buNone /></a:pPr><a:r><a:rPr /><a:t>Yes</a:t></a:r></a:p></a:txBody></a:tc><a:tc><a:txBody><a:bodyPr /><a:lstStyle /><a:p><a:pPr lvl="0" indent="0" marL="0"><a:buNone /></a:pPr><a:r><a:rPr /><a:t>Yes</a:t></a:r></a:p></a:txBody></a:tc></a:tr></a:tbl></a:graphicData></a:graphic></p:graphicFrame></p:spTree></p:cSld></p:sld>
+<file path=ppt/slides/slide6.xml><?xml version="1.0" encoding="utf-8"?>
+<p:sld xmlns:a="http://schemas.openxmlformats.org/drawingml/2006/main" xmlns:r="http://schemas.openxmlformats.org/officeDocument/2006/relationships" xmlns:p="http://schemas.openxmlformats.org/presentationml/2006/main" xmlns:a14="http://schemas.microsoft.com/office/drawing/2010/main" xmlns:m="http://schemas.openxmlformats.org/officeDocument/2006/math">
+  <p:cSld>
+    <p:spTree>
+      <p:nvGrpSpPr>
+        <p:cNvPr id="1" name=""/>
+        <p:cNvGrpSpPr/>
+        <p:nvPr/>
+      </p:nvGrpSpPr>
+      <p:grpSpPr>
+        <a:xfrm>
+          <a:off x="0" y="0"/>
+          <a:ext cx="0" cy="0"/>
+          <a:chOff x="0" y="0"/>
+          <a:chExt cx="0" cy="0"/>
+        </a:xfrm>
+      </p:grpSpPr>
+      <p:sp>
+        <p:nvSpPr>
+          <p:cNvPr id="2" name="Title 1"/>
+          <p:cNvSpPr>
+            <a:spLocks noGrp="1"/>
+          </p:cNvSpPr>
+          <p:nvPr>
+            <p:ph type="title"/>
+          </p:nvPr>
+        </p:nvSpPr>
+        <p:spPr>
+          <a:xfrm>
+            <a:off x="457200" y="205979"/>
+            <a:ext cx="8229600" cy="857250"/>
+          </a:xfrm>
+        </p:spPr>
+        <p:txBody>
+          <a:bodyPr/>
+          <a:lstStyle/>
+          <a:p>
+            <a:pPr lvl="0" indent="0" marL="0">
+              <a:buNone/>
+            </a:pPr>
+            <a:r>
+              <a:rPr/>
+              <a:t>Comparing the estimators</a:t>
+            </a:r>
+          </a:p>
+        </p:txBody>
+      </p:sp>
+      <p:graphicFrame>
+        <p:nvGraphicFramePr>
+          <p:cNvPr id="6" name="Content Placeholder 5"/>
+          <p:cNvGraphicFramePr>
+            <a:graphicFrameLocks noGrp="1"/>
+          </p:cNvGraphicFramePr>
+          <p:nvPr>
+            <p:ph idx="1"/>
+          </p:nvPr>
+        </p:nvGraphicFramePr>
+        <p:xfrm>
+          <a:off x="457200" y="1193800"/>
+          <a:ext cx="8229600" cy="3390900"/>
+        </p:xfrm>
+        <a:graphic>
+          <a:graphicData uri="http://schemas.openxmlformats.org/drawingml/2006/table">
+            <a:tbl>
+              <a:tblPr firstRow="1" bandRow="1">
+                <a:tableStyleId>{5C22544A-7EE6-4342-B048-85BDC9FD1C3A}</a:tableStyleId>
+              </a:tblPr>
+              <a:tblGrid>
+                <a:gridCol w="2057400"/>
+                <a:gridCol w="2057400"/>
+                <a:gridCol w="2057400"/>
+                <a:gridCol w="2057400"/>
+              </a:tblGrid>
+              <a:tr h="0">
+                <a:tc>
+                  <a:txBody>
+                    <a:bodyPr/>
+                    <a:lstStyle/>
+                    <a:p>
+                      <a:pPr lvl="0" indent="0" marL="0">
+                        <a:buNone/>
+                      </a:pPr>
+                      <a:r>
+                        <a:rPr/>
+                        <a:t>Method</a:t>
+                      </a:r>
+                    </a:p>
+                  </a:txBody>
+                  <a:tcPr/>
+                </a:tc>
+                <a:tc>
+                  <a:txBody>
+                    <a:bodyPr/>
+                    <a:lstStyle/>
+                    <a:p>
+                      <a:pPr lvl="0" indent="0" marL="0">
+                        <a:buNone/>
+                      </a:pPr>
+                      <a:r>
+                        <a:rPr/>
+                        <a:t>Closed form</a:t>
+                      </a:r>
+                    </a:p>
+                  </a:txBody>
+                  <a:tcPr/>
+                </a:tc>
+                <a:tc>
+                  <a:txBody>
+                    <a:bodyPr/>
+                    <a:lstStyle/>
+                    <a:p>
+                      <a:pPr lvl="0" indent="0" marL="0">
+                        <a:buNone/>
+                      </a:pPr>
+                      <a:r>
+                        <a:rPr/>
+                        <a:t>Scales to large </a:t>
+                      </a:r>
+                      <a14:m>
+                        <m:oMath xmlns:m="http://schemas.openxmlformats.org/officeDocument/2006/math">
+                          <m:r>
+                            <m:t>n</m:t>
+                          </m:r>
+                        </m:oMath>
+                      </a14:m>
+                    </a:p>
+                  </a:txBody>
+                  <a:tcPr/>
+                </a:tc>
+                <a:tc>
+                  <a:txBody>
+                    <a:bodyPr/>
+                    <a:lstStyle/>
+                    <a:p>
+                      <a:pPr lvl="0" indent="0" marL="0">
+                        <a:buNone/>
+                      </a:pPr>
+                      <a:r>
+                        <a:rPr/>
+                        <a:t>Handles collinearity</a:t>
+                      </a:r>
+                    </a:p>
+                  </a:txBody>
+                  <a:tcPr/>
+                </a:tc>
+              </a:tr>
+              <a:tr h="0">
+                <a:tc>
+                  <a:txBody>
+                    <a:bodyPr/>
+                    <a:lstStyle/>
+                    <a:p>
+                      <a:pPr lvl="0" indent="0" marL="0">
+                        <a:buNone/>
+                      </a:pPr>
+                      <a:r>
+                        <a:rPr/>
+                        <a:t>Normal equation</a:t>
+                      </a:r>
+                    </a:p>
+                  </a:txBody>
+                </a:tc>
+                <a:tc>
+                  <a:txBody>
+                    <a:bodyPr/>
+                    <a:lstStyle/>
+                    <a:p>
+                      <a:pPr lvl="0" indent="0" marL="0">
+                        <a:buNone/>
+                      </a:pPr>
+                      <a:r>
+                        <a:rPr/>
+                        <a:t>Yes</a:t>
+                      </a:r>
+                    </a:p>
+                  </a:txBody>
+                </a:tc>
+                <a:tc>
+                  <a:txBody>
+                    <a:bodyPr/>
+                    <a:lstStyle/>
+                    <a:p>
+                      <a:pPr lvl="0" indent="0" marL="0">
+                        <a:buNone/>
+                      </a:pPr>
+                      <a:r>
+                        <a:rPr/>
+                        <a:t>No</a:t>
+                      </a:r>
+                    </a:p>
+                  </a:txBody>
+                </a:tc>
+                <a:tc>
+                  <a:txBody>
+                    <a:bodyPr/>
+                    <a:lstStyle/>
+                    <a:p>
+                      <a:pPr lvl="0" indent="0" marL="0">
+                        <a:buNone/>
+                      </a:pPr>
+                      <a:r>
+                        <a:rPr/>
+                        <a:t>No</a:t>
+                      </a:r>
+                    </a:p>
+                  </a:txBody>
+                </a:tc>
+              </a:tr>
+              <a:tr h="0">
+                <a:tc>
+                  <a:txBody>
+                    <a:bodyPr/>
+                    <a:lstStyle/>
+                    <a:p>
+                      <a:pPr lvl="0" indent="0" marL="0">
+                        <a:buNone/>
+                      </a:pPr>
+                      <a:r>
+                        <a:rPr/>
+                        <a:t>Gradient descent</a:t>
+                      </a:r>
+                    </a:p>
+                  </a:txBody>
+                </a:tc>
+                <a:tc>
+                  <a:txBody>
+                    <a:bodyPr/>
+                    <a:lstStyle/>
+                    <a:p>
+                      <a:pPr lvl="0" indent="0" marL="0">
+                        <a:buNone/>
+                      </a:pPr>
+                      <a:r>
+                        <a:rPr/>
+                        <a:t>No</a:t>
+                      </a:r>
+                    </a:p>
+                  </a:txBody>
+                </a:tc>
+                <a:tc>
+                  <a:txBody>
+                    <a:bodyPr/>
+                    <a:lstStyle/>
+                    <a:p>
+                      <a:pPr lvl="0" indent="0" marL="0">
+                        <a:buNone/>
+                      </a:pPr>
+                      <a:r>
+                        <a:rPr/>
+                        <a:t>Yes</a:t>
+                      </a:r>
+                    </a:p>
+                  </a:txBody>
+                </a:tc>
+                <a:tc>
+                  <a:txBody>
+                    <a:bodyPr/>
+                    <a:lstStyle/>
+                    <a:p>
+                      <a:pPr lvl="0" indent="0" marL="0">
+                        <a:buNone/>
+                      </a:pPr>
+                      <a:r>
+                        <a:rPr/>
+                        <a:t>Partly</a:t>
+                      </a:r>
+                    </a:p>
+                  </a:txBody>
+                </a:tc>
+              </a:tr>
+              <a:tr h="0">
+                <a:tc>
+                  <a:txBody>
+                    <a:bodyPr/>
+                    <a:lstStyle/>
+                    <a:p>
+                      <a:pPr lvl="0" indent="0" marL="0">
+                        <a:buNone/>
+                      </a:pPr>
+                      <a:r>
+                        <a:rPr/>
+                        <a:t>Ridge</a:t>
+                      </a:r>
+                    </a:p>
+                  </a:txBody>
+                </a:tc>
+                <a:tc>
+                  <a:txBody>
+                    <a:bodyPr/>
+                    <a:lstStyle/>
+                    <a:p>
+                      <a:pPr lvl="0" indent="0" marL="0">
+                        <a:buNone/>
+                      </a:pPr>
+                      <a:r>
+                        <a:rPr/>
+                        <a:t>Yes</a:t>
+                      </a:r>
+                    </a:p>
+                  </a:txBody>
+                </a:tc>
+                <a:tc>
+                  <a:txBody>
+                    <a:bodyPr/>
+                    <a:lstStyle/>
+                    <a:p>
+                      <a:pPr lvl="0" indent="0" marL="0">
+                        <a:buNone/>
+                      </a:pPr>
+                      <a:r>
+                        <a:rPr/>
+                        <a:t>Yes</a:t>
+                      </a:r>
+                    </a:p>
+                  </a:txBody>
+                </a:tc>
+                <a:tc>
+                  <a:txBody>
+                    <a:bodyPr/>
+                    <a:lstStyle/>
+                    <a:p>
+                      <a:pPr lvl="0" indent="0" marL="0">
+                        <a:buNone/>
+                      </a:pPr>
+                      <a:r>
+                        <a:rPr/>
+                        <a:t>Yes</a:t>
+                      </a:r>
+                    </a:p>
+                  </a:txBody>
+                </a:tc>
+              </a:tr>
+            </a:tbl>
+          </a:graphicData>
+        </a:graphic>
+      </p:graphicFrame>
+    </p:spTree>
+  </p:cSld>
+</p:sld>
 </file>
 
 <file path=ppt/slides/slide7.xml><?xml version="1.0" encoding="utf-8"?>
@@ -3988,7 +4356,12 @@
             <p:ph type="title"/>
           </p:nvPr>
         </p:nvSpPr>
-        <p:spPr/>
+        <p:spPr>
+          <a:xfrm>
+            <a:off x="457200" y="205979"/>
+            <a:ext cx="8229600" cy="857250"/>
+          </a:xfrm>
+        </p:spPr>
         <p:txBody>
           <a:bodyPr/>
           <a:lstStyle/>
@@ -4013,7 +4386,12 @@
             <p:ph idx="1"/>
           </p:nvPr>
         </p:nvSpPr>
-        <p:spPr/>
+        <p:spPr>
+          <a:xfrm>
+            <a:off x="457200" y="1200151"/>
+            <a:ext cx="8229600" cy="3394472"/>
+          </a:xfrm>
+        </p:spPr>
         <p:txBody>
           <a:bodyPr/>
           <a:lstStyle/>
@@ -4132,7 +4510,12 @@
             <p:ph type="title"/>
           </p:nvPr>
         </p:nvSpPr>
-        <p:spPr/>
+        <p:spPr>
+          <a:xfrm>
+            <a:off x="457200" y="205979"/>
+            <a:ext cx="8229600" cy="857250"/>
+          </a:xfrm>
+        </p:spPr>
         <p:txBody>
           <a:bodyPr/>
           <a:lstStyle/>
@@ -4157,7 +4540,12 @@
             <p:ph idx="1" sz="half"/>
           </p:nvPr>
         </p:nvSpPr>
-        <p:spPr/>
+        <p:spPr>
+          <a:xfrm>
+            <a:off x="457200" y="1200151"/>
+            <a:ext cx="4038600" cy="3394472"/>
+          </a:xfrm>
+        </p:spPr>
         <p:txBody>
           <a:bodyPr/>
           <a:lstStyle/>
@@ -4196,7 +4584,12 @@
             <p:ph idx="2" sz="half"/>
           </p:nvPr>
         </p:nvSpPr>
-        <p:spPr/>
+        <p:spPr>
+          <a:xfrm>
+            <a:off x="4648200" y="1200151"/>
+            <a:ext cx="4038600" cy="3394472"/>
+          </a:xfrm>
+        </p:spPr>
         <p:txBody>
           <a:bodyPr/>
           <a:lstStyle/>
@@ -4257,7 +4650,12 @@
             <p:ph type="title"/>
           </p:nvPr>
         </p:nvSpPr>
-        <p:spPr/>
+        <p:spPr>
+          <a:xfrm>
+            <a:off x="457200" y="205979"/>
+            <a:ext cx="8229600" cy="857250"/>
+          </a:xfrm>
+        </p:spPr>
         <p:txBody>
           <a:bodyPr/>
           <a:lstStyle/>
@@ -4282,7 +4680,12 @@
             <p:ph idx="1"/>
           </p:nvPr>
         </p:nvSpPr>
-        <p:spPr/>
+        <p:spPr>
+          <a:xfrm>
+            <a:off x="457200" y="1200151"/>
+            <a:ext cx="8229600" cy="3394472"/>
+          </a:xfrm>
+        </p:spPr>
         <p:txBody>
           <a:bodyPr/>
           <a:lstStyle/>
@@ -4632,265 +5035,4 @@
   </a:objectDefaults>
   <a:extraClrSchemeLst/>
 </a:theme>
-</file>
-
-<file path=ppt/theme/theme2.xml><?xml version="1.0" encoding="utf-8"?>
-<a:theme xmlns:a="http://schemas.openxmlformats.org/drawingml/2006/main" name="Office Theme">
-  <a:themeElements>
-    <a:clrScheme name="Office">
-      <a:dk1>
-        <a:sysClr val="windowText" lastClr="1A1A1A"/>
-      </a:dk1>
-      <a:lt1>
-        <a:sysClr val="window" lastClr="FFFFFF"/>
-      </a:lt1>
-      <a:dk2>
-        <a:srgbClr val="44546A"/>
-      </a:dk2>
-      <a:lt2>
-        <a:srgbClr val="E7E6E6"/>
-      </a:lt2>
-      <a:accent1>
-        <a:srgbClr val="1F4E79"/>
-      </a:accent1>
-      <a:accent2>
-        <a:srgbClr val="2E7D8A"/>
-      </a:accent2>
-      <a:accent3>
-        <a:srgbClr val="F0BE50"/>
-      </a:accent3>
-      <a:accent4>
-        <a:srgbClr val="4A5568"/>
-      </a:accent4>
-      <a:accent5>
-        <a:srgbClr val="9C4221"/>
-      </a:accent5>
-      <a:accent6>
-        <a:srgbClr val="1A1A1A"/>
-      </a:accent6>
-      <a:hlink>
-        <a:srgbClr val="0563C1"/>
-      </a:hlink>
-      <a:folHlink>
-        <a:srgbClr val="954F72"/>
-      </a:folHlink>
-    </a:clrScheme>
-    <a:fontScheme name="Office">
-      <a:majorFont>
-        <a:latin typeface="Segoe UI Semibold" panose="020F0302020204030204"/>
-        <a:ea typeface=""/>
-        <a:cs typeface=""/>
-        <a:font script="Jpan" typeface="ＭＳ Ｐゴシック"/>
-        <a:font script="Hang" typeface="맑은 고딕"/>
-        <a:font script="Hans" typeface="宋体"/>
-        <a:font script="Hant" typeface="新細明體"/>
-        <a:font script="Arab" typeface="Times New Roman"/>
-        <a:font script="Hebr" typeface="Times New Roman"/>
-        <a:font script="Thai" typeface="Angsana New"/>
-        <a:font script="Ethi" typeface="Nyala"/>
-        <a:font script="Beng" typeface="Vrinda"/>
-        <a:font script="Gujr" typeface="Shruti"/>
-        <a:font script="Khmr" typeface="MoolBoran"/>
-        <a:font script="Knda" typeface="Tunga"/>
-        <a:font script="Guru" typeface="Raavi"/>
-        <a:font script="Cans" typeface="Euphemia"/>
-        <a:font script="Cher" typeface="Plantagenet Cherokee"/>
-        <a:font script="Yiii" typeface="Microsoft Yi Baiti"/>
-        <a:font script="Tibt" typeface="Microsoft Himalaya"/>
-        <a:font script="Thaa" typeface="MV Boli"/>
-        <a:font script="Deva" typeface="Mangal"/>
-        <a:font script="Telu" typeface="Gautami"/>
-        <a:font script="Taml" typeface="Latha"/>
-        <a:font script="Syrc" typeface="Estrangelo Edessa"/>
-        <a:font script="Orya" typeface="Kalinga"/>
-        <a:font script="Mlym" typeface="Kartika"/>
-        <a:font script="Laoo" typeface="DokChampa"/>
-        <a:font script="Sinh" typeface="Iskoola Pota"/>
-        <a:font script="Mong" typeface="Mongolian Baiti"/>
-        <a:font script="Viet" typeface="Times New Roman"/>
-        <a:font script="Uigh" typeface="Microsoft Uighur"/>
-        <a:font script="Geor" typeface="Sylfaen"/>
-      </a:majorFont>
-      <a:minorFont>
-        <a:latin typeface="Segoe UI" panose="020F0502020204030204"/>
-        <a:ea typeface=""/>
-        <a:cs typeface=""/>
-        <a:font script="Jpan" typeface="ＭＳ Ｐゴシック"/>
-        <a:font script="Hang" typeface="맑은 고딕"/>
-        <a:font script="Hans" typeface="宋体"/>
-        <a:font script="Hant" typeface="新細明體"/>
-        <a:font script="Arab" typeface="Arial"/>
-        <a:font script="Hebr" typeface="Arial"/>
-        <a:font script="Thai" typeface="Cordia New"/>
-        <a:font script="Ethi" typeface="Nyala"/>
-        <a:font script="Beng" typeface="Vrinda"/>
-        <a:font script="Gujr" typeface="Shruti"/>
-        <a:font script="Khmr" typeface="DaunPenh"/>
-        <a:font script="Knda" typeface="Tunga"/>
-        <a:font script="Guru" typeface="Raavi"/>
-        <a:font script="Cans" typeface="Euphemia"/>
-        <a:font script="Cher" typeface="Plantagenet Cherokee"/>
-        <a:font script="Yiii" typeface="Microsoft Yi Baiti"/>
-        <a:font script="Tibt" typeface="Microsoft Himalaya"/>
-        <a:font script="Thaa" typeface="MV Boli"/>
-        <a:font script="Deva" typeface="Mangal"/>
-        <a:font script="Telu" typeface="Gautami"/>
-        <a:font script="Taml" typeface="Latha"/>
-        <a:font script="Syrc" typeface="Estrangelo Edessa"/>
-        <a:font script="Orya" typeface="Kalinga"/>
-        <a:font script="Mlym" typeface="Kartika"/>
-        <a:font script="Laoo" typeface="DokChampa"/>
-        <a:font script="Sinh" typeface="Iskoola Pota"/>
-        <a:font script="Mong" typeface="Mongolian Baiti"/>
-        <a:font script="Viet" typeface="Arial"/>
-        <a:font script="Uigh" typeface="Microsoft Uighur"/>
-        <a:font script="Geor" typeface="Sylfaen"/>
-      </a:minorFont>
-    </a:fontScheme>
-    <a:fmtScheme name="Office">
-      <a:fillStyleLst>
-        <a:solidFill>
-          <a:schemeClr val="phClr"/>
-        </a:solidFill>
-        <a:gradFill rotWithShape="1">
-          <a:gsLst>
-            <a:gs pos="0">
-              <a:schemeClr val="phClr">
-                <a:lumMod val="110000"/>
-                <a:satMod val="105000"/>
-                <a:tint val="67000"/>
-              </a:schemeClr>
-            </a:gs>
-            <a:gs pos="50000">
-              <a:schemeClr val="phClr">
-                <a:lumMod val="105000"/>
-                <a:satMod val="103000"/>
-                <a:tint val="73000"/>
-              </a:schemeClr>
-            </a:gs>
-            <a:gs pos="100000">
-              <a:schemeClr val="phClr">
-                <a:lumMod val="105000"/>
-                <a:satMod val="109000"/>
-                <a:tint val="81000"/>
-              </a:schemeClr>
-            </a:gs>
-          </a:gsLst>
-          <a:lin ang="5400000" scaled="0"/>
-        </a:gradFill>
-        <a:gradFill rotWithShape="1">
-          <a:gsLst>
-            <a:gs pos="0">
-              <a:schemeClr val="phClr">
-                <a:satMod val="103000"/>
-                <a:lumMod val="102000"/>
-                <a:tint val="94000"/>
-              </a:schemeClr>
-            </a:gs>
-            <a:gs pos="50000">
-              <a:schemeClr val="phClr">
-                <a:satMod val="110000"/>
-                <a:lumMod val="100000"/>
-                <a:shade val="100000"/>
-              </a:schemeClr>
-            </a:gs>
-            <a:gs pos="100000">
-              <a:schemeClr val="phClr">
-                <a:lumMod val="99000"/>
-                <a:satMod val="120000"/>
-                <a:shade val="78000"/>
-              </a:schemeClr>
-            </a:gs>
-          </a:gsLst>
-          <a:lin ang="5400000" scaled="0"/>
-        </a:gradFill>
-      </a:fillStyleLst>
-      <a:lnStyleLst>
-        <a:ln w="6350" cap="flat" cmpd="sng" algn="ctr">
-          <a:solidFill>
-            <a:schemeClr val="phClr"/>
-          </a:solidFill>
-          <a:prstDash val="solid"/>
-          <a:miter lim="800000"/>
-        </a:ln>
-        <a:ln w="12700" cap="flat" cmpd="sng" algn="ctr">
-          <a:solidFill>
-            <a:schemeClr val="phClr"/>
-          </a:solidFill>
-          <a:prstDash val="solid"/>
-          <a:miter lim="800000"/>
-        </a:ln>
-        <a:ln w="19050" cap="flat" cmpd="sng" algn="ctr">
-          <a:solidFill>
-            <a:schemeClr val="phClr"/>
-          </a:solidFill>
-          <a:prstDash val="solid"/>
-          <a:miter lim="800000"/>
-        </a:ln>
-      </a:lnStyleLst>
-      <a:effectStyleLst>
-        <a:effectStyle>
-          <a:effectLst/>
-        </a:effectStyle>
-        <a:effectStyle>
-          <a:effectLst/>
-        </a:effectStyle>
-        <a:effectStyle>
-          <a:effectLst>
-            <a:outerShdw blurRad="57150" dist="19050" dir="5400000" algn="ctr" rotWithShape="0">
-              <a:srgbClr val="000000">
-                <a:alpha val="63000"/>
-              </a:srgbClr>
-            </a:outerShdw>
-          </a:effectLst>
-        </a:effectStyle>
-      </a:effectStyleLst>
-      <a:bgFillStyleLst>
-        <a:solidFill>
-          <a:schemeClr val="phClr"/>
-        </a:solidFill>
-        <a:solidFill>
-          <a:schemeClr val="phClr">
-            <a:tint val="95000"/>
-            <a:satMod val="170000"/>
-          </a:schemeClr>
-        </a:solidFill>
-        <a:gradFill rotWithShape="1">
-          <a:gsLst>
-            <a:gs pos="0">
-              <a:schemeClr val="phClr">
-                <a:tint val="93000"/>
-                <a:satMod val="150000"/>
-                <a:shade val="98000"/>
-                <a:lumMod val="102000"/>
-              </a:schemeClr>
-            </a:gs>
-            <a:gs pos="50000">
-              <a:schemeClr val="phClr">
-                <a:tint val="98000"/>
-                <a:satMod val="130000"/>
-                <a:shade val="90000"/>
-                <a:lumMod val="103000"/>
-              </a:schemeClr>
-            </a:gs>
-            <a:gs pos="100000">
-              <a:schemeClr val="phClr">
-                <a:shade val="63000"/>
-                <a:satMod val="120000"/>
-              </a:schemeClr>
-            </a:gs>
-          </a:gsLst>
-          <a:lin ang="5400000" scaled="0"/>
-        </a:gradFill>
-      </a:bgFillStyleLst>
-    </a:fmtScheme>
-  </a:themeElements>
-  <a:objectDefaults/>
-  <a:extraClrSchemeLst/>
-  <a:extLst>
-    <a:ext uri="{05A4C25C-085E-4340-85A3-A5531E510DB2}">
-      <thm15:themeFamily xmlns:thm15="http://schemas.microsoft.com/office/thememl/2012/main" name="Office Theme" id="{62F939B6-93AF-4DB8-9C6B-D6C7DFDC589F}" vid="{4A3C46E8-61CC-4603-A589-7422A47A8E4A}"/>
-    </a:ext>
-  </a:extLst>
-</a:theme>
 </file>
--- a/Course/slides_syntax_example.pptx
+++ b/Course/slides_syntax_example.pptx
@@ -4,6 +4,9 @@
   <p:sldMasterIdLst>
     <p:sldMasterId id="2147483648" r:id="rId1"/>
   </p:sldMasterIdLst>
+  <p:notesMasterIdLst>
+    <p:notesMasterId r:id="rId12"/>
+  </p:notesMasterIdLst>
   <p:sldIdLst>
     <p:sldId id="256" r:id="rId2"/>
     <p:sldId id="257" r:id="rId3"/>
@@ -14,6 +17,7 @@
     <p:sldId id="262" r:id="rId8"/>
     <p:sldId id="263" r:id="rId9"/>
     <p:sldId id="264" r:id="rId10"/>
+    <p:sldId id="265" r:id="rId11"/>
   </p:sldIdLst>
   <p:sldSz cx="9144000" cy="5143500" type="screen16x9"/>
   <p:notesSz cx="6858000" cy="9144000"/>
@@ -131,6 +135,461 @@
 </p:presentation>
 </file>
 
+<file path=ppt/notesMasters/notesMaster1.xml><?xml version="1.0" encoding="utf-8"?>
+<p:notesMaster xmlns:a="http://schemas.openxmlformats.org/drawingml/2006/main" xmlns:r="http://schemas.openxmlformats.org/officeDocument/2006/relationships" xmlns:p="http://schemas.openxmlformats.org/presentationml/2006/main">
+  <p:cSld>
+    <p:bg>
+      <p:bgRef idx="1001">
+        <a:schemeClr val="bg1"/>
+      </p:bgRef>
+    </p:bg>
+    <p:spTree>
+      <p:nvGrpSpPr>
+        <p:cNvPr id="1" name=""/>
+        <p:cNvGrpSpPr/>
+        <p:nvPr/>
+      </p:nvGrpSpPr>
+      <p:grpSpPr>
+        <a:xfrm>
+          <a:off x="0" y="0"/>
+          <a:ext cx="0" cy="0"/>
+          <a:chOff x="0" y="0"/>
+          <a:chExt cx="0" cy="0"/>
+        </a:xfrm>
+      </p:grpSpPr>
+      <p:sp>
+        <p:nvSpPr>
+          <p:cNvPr id="2" name="Header Placeholder 1"/>
+          <p:cNvSpPr>
+            <a:spLocks noGrp="1"/>
+          </p:cNvSpPr>
+          <p:nvPr>
+            <p:ph type="hdr" sz="quarter"/>
+          </p:nvPr>
+        </p:nvSpPr>
+        <p:spPr>
+          <a:xfrm>
+            <a:off x="0" y="0"/>
+            <a:ext cx="2971800" cy="458788"/>
+          </a:xfrm>
+          <a:prstGeom prst="rect">
+            <a:avLst/>
+          </a:prstGeom>
+        </p:spPr>
+        <p:txBody>
+          <a:bodyPr vert="horz" lIns="91440" tIns="45720" rIns="91440" bIns="45720" rtlCol="0"/>
+          <a:lstStyle>
+            <a:lvl1pPr algn="l">
+              <a:defRPr sz="1200"/>
+            </a:lvl1pPr>
+          </a:lstStyle>
+          <a:p>
+            <a:endParaRPr lang="en-US"/>
+          </a:p>
+        </p:txBody>
+      </p:sp>
+      <p:sp>
+        <p:nvSpPr>
+          <p:cNvPr id="3" name="Date Placeholder 2"/>
+          <p:cNvSpPr>
+            <a:spLocks noGrp="1"/>
+          </p:cNvSpPr>
+          <p:nvPr>
+            <p:ph type="dt" idx="1"/>
+          </p:nvPr>
+        </p:nvSpPr>
+        <p:spPr>
+          <a:xfrm>
+            <a:off x="3884613" y="0"/>
+            <a:ext cx="2971800" cy="458788"/>
+          </a:xfrm>
+          <a:prstGeom prst="rect">
+            <a:avLst/>
+          </a:prstGeom>
+        </p:spPr>
+        <p:txBody>
+          <a:bodyPr vert="horz" lIns="91440" tIns="45720" rIns="91440" bIns="45720" rtlCol="0"/>
+          <a:lstStyle>
+            <a:lvl1pPr algn="r">
+              <a:defRPr sz="1200"/>
+            </a:lvl1pPr>
+          </a:lstStyle>
+          <a:p>
+            <a:fld id="{0F9C1CCF-B725-44A7-AA57-5E433BD85C9F}" type="datetimeFigureOut">
+              <a:rPr lang="en-US" smtClean="0"/>
+              <a:t>1/2/22</a:t>
+            </a:fld>
+            <a:endParaRPr lang="en-US"/>
+          </a:p>
+        </p:txBody>
+      </p:sp>
+      <p:sp>
+        <p:nvSpPr>
+          <p:cNvPr id="4" name="Slide Image Placeholder 3"/>
+          <p:cNvSpPr>
+            <a:spLocks noGrp="1" noRot="1" noChangeAspect="1"/>
+          </p:cNvSpPr>
+          <p:nvPr>
+            <p:ph type="sldImg" idx="2"/>
+          </p:nvPr>
+        </p:nvSpPr>
+        <p:spPr>
+          <a:xfrm>
+            <a:off x="685800" y="1143000"/>
+            <a:ext cx="5486400" cy="3086100"/>
+          </a:xfrm>
+          <a:prstGeom prst="rect">
+            <a:avLst/>
+          </a:prstGeom>
+          <a:noFill/>
+          <a:ln w="12700">
+            <a:solidFill>
+              <a:prstClr val="black"/>
+            </a:solidFill>
+          </a:ln>
+        </p:spPr>
+        <p:txBody>
+          <a:bodyPr vert="horz" lIns="91440" tIns="45720" rIns="91440" bIns="45720" rtlCol="0" anchor="ctr"/>
+          <a:lstStyle/>
+          <a:p>
+            <a:endParaRPr lang="en-US"/>
+          </a:p>
+        </p:txBody>
+      </p:sp>
+      <p:sp>
+        <p:nvSpPr>
+          <p:cNvPr id="5" name="Notes Placeholder 4"/>
+          <p:cNvSpPr>
+            <a:spLocks noGrp="1"/>
+          </p:cNvSpPr>
+          <p:nvPr>
+            <p:ph type="body" sz="quarter" idx="3"/>
+          </p:nvPr>
+        </p:nvSpPr>
+        <p:spPr>
+          <a:xfrm>
+            <a:off x="685800" y="4400550"/>
+            <a:ext cx="5486400" cy="3600450"/>
+          </a:xfrm>
+          <a:prstGeom prst="rect">
+            <a:avLst/>
+          </a:prstGeom>
+        </p:spPr>
+        <p:txBody>
+          <a:bodyPr vert="horz" lIns="91440" tIns="45720" rIns="91440" bIns="45720" rtlCol="0"/>
+          <a:lstStyle/>
+          <a:p>
+            <a:pPr lvl="0"/>
+            <a:r>
+              <a:rPr lang="en-US"/>
+              <a:t>Click to edit Master text styles</a:t>
+            </a:r>
+          </a:p>
+          <a:p>
+            <a:pPr lvl="1"/>
+            <a:r>
+              <a:rPr lang="en-US"/>
+              <a:t>Second level</a:t>
+            </a:r>
+          </a:p>
+          <a:p>
+            <a:pPr lvl="2"/>
+            <a:r>
+              <a:rPr lang="en-US"/>
+              <a:t>Third level</a:t>
+            </a:r>
+          </a:p>
+          <a:p>
+            <a:pPr lvl="3"/>
+            <a:r>
+              <a:rPr lang="en-US"/>
+              <a:t>Fourth level</a:t>
+            </a:r>
+          </a:p>
+          <a:p>
+            <a:pPr lvl="4"/>
+            <a:r>
+              <a:rPr lang="en-US"/>
+              <a:t>Fifth level</a:t>
+            </a:r>
+          </a:p>
+        </p:txBody>
+      </p:sp>
+      <p:sp>
+        <p:nvSpPr>
+          <p:cNvPr id="6" name="Footer Placeholder 5"/>
+          <p:cNvSpPr>
+            <a:spLocks noGrp="1"/>
+          </p:cNvSpPr>
+          <p:nvPr>
+            <p:ph type="ftr" sz="quarter" idx="4"/>
+          </p:nvPr>
+        </p:nvSpPr>
+        <p:spPr>
+          <a:xfrm>
+            <a:off x="0" y="8685213"/>
+            <a:ext cx="2971800" cy="458787"/>
+          </a:xfrm>
+          <a:prstGeom prst="rect">
+            <a:avLst/>
+          </a:prstGeom>
+        </p:spPr>
+        <p:txBody>
+          <a:bodyPr vert="horz" lIns="91440" tIns="45720" rIns="91440" bIns="45720" rtlCol="0" anchor="b"/>
+          <a:lstStyle>
+            <a:lvl1pPr algn="l">
+              <a:defRPr sz="1200"/>
+            </a:lvl1pPr>
+          </a:lstStyle>
+          <a:p>
+            <a:endParaRPr lang="en-US"/>
+          </a:p>
+        </p:txBody>
+      </p:sp>
+      <p:sp>
+        <p:nvSpPr>
+          <p:cNvPr id="7" name="Slide Number Placeholder 6"/>
+          <p:cNvSpPr>
+            <a:spLocks noGrp="1"/>
+          </p:cNvSpPr>
+          <p:nvPr>
+            <p:ph type="sldNum" sz="quarter" idx="5"/>
+          </p:nvPr>
+        </p:nvSpPr>
+        <p:spPr>
+          <a:xfrm>
+            <a:off x="3884613" y="8685213"/>
+            <a:ext cx="2971800" cy="458787"/>
+          </a:xfrm>
+          <a:prstGeom prst="rect">
+            <a:avLst/>
+          </a:prstGeom>
+        </p:spPr>
+        <p:txBody>
+          <a:bodyPr vert="horz" lIns="91440" tIns="45720" rIns="91440" bIns="45720" rtlCol="0" anchor="b"/>
+          <a:lstStyle>
+            <a:lvl1pPr algn="r">
+              <a:defRPr sz="1200"/>
+            </a:lvl1pPr>
+          </a:lstStyle>
+          <a:p>
+            <a:fld id="{18BDFEC3-8487-43E8-A154-7C12CBC1FFF2}" type="slidenum">
+              <a:rPr lang="en-US" smtClean="0"/>
+              <a:t>‹#›</a:t>
+            </a:fld>
+            <a:endParaRPr lang="en-US"/>
+          </a:p>
+        </p:txBody>
+      </p:sp>
+    </p:spTree>
+    <p:extLst>
+      <p:ext uri="{BB962C8B-B14F-4D97-AF65-F5344CB8AC3E}">
+        <p14:creationId xmlns:p14="http://schemas.microsoft.com/office/powerpoint/2010/main" val="3782709779"/>
+      </p:ext>
+    </p:extLst>
+  </p:cSld>
+  <p:clrMap bg1="lt1" tx1="dk1" bg2="lt2" tx2="dk2" accent1="accent1" accent2="accent2" accent3="accent3" accent4="accent4" accent5="accent5" accent6="accent6" hlink="hlink" folHlink="folHlink"/>
+  <p:notesStyle>
+    <a:lvl1pPr marL="0" algn="l" defTabSz="914400" rtl="0" eaLnBrk="1" latinLnBrk="0" hangingPunct="1">
+      <a:defRPr sz="1200" kern="1200">
+        <a:solidFill>
+          <a:schemeClr val="tx1"/>
+        </a:solidFill>
+        <a:latin typeface="+mn-lt"/>
+        <a:ea typeface="+mn-ea"/>
+        <a:cs typeface="+mn-cs"/>
+      </a:defRPr>
+    </a:lvl1pPr>
+    <a:lvl2pPr marL="457200" algn="l" defTabSz="914400" rtl="0" eaLnBrk="1" latinLnBrk="0" hangingPunct="1">
+      <a:defRPr sz="1200" kern="1200">
+        <a:solidFill>
+          <a:schemeClr val="tx1"/>
+        </a:solidFill>
+        <a:latin typeface="+mn-lt"/>
+        <a:ea typeface="+mn-ea"/>
+        <a:cs typeface="+mn-cs"/>
+      </a:defRPr>
+    </a:lvl2pPr>
+    <a:lvl3pPr marL="914400" algn="l" defTabSz="914400" rtl="0" eaLnBrk="1" latinLnBrk="0" hangingPunct="1">
+      <a:defRPr sz="1200" kern="1200">
+        <a:solidFill>
+          <a:schemeClr val="tx1"/>
+        </a:solidFill>
+        <a:latin typeface="+mn-lt"/>
+        <a:ea typeface="+mn-ea"/>
+        <a:cs typeface="+mn-cs"/>
+      </a:defRPr>
+    </a:lvl3pPr>
+    <a:lvl4pPr marL="1371600" algn="l" defTabSz="914400" rtl="0" eaLnBrk="1" latinLnBrk="0" hangingPunct="1">
+      <a:defRPr sz="1200" kern="1200">
+        <a:solidFill>
+          <a:schemeClr val="tx1"/>
+        </a:solidFill>
+        <a:latin typeface="+mn-lt"/>
+        <a:ea typeface="+mn-ea"/>
+        <a:cs typeface="+mn-cs"/>
+      </a:defRPr>
+    </a:lvl4pPr>
+    <a:lvl5pPr marL="1828800" algn="l" defTabSz="914400" rtl="0" eaLnBrk="1" latinLnBrk="0" hangingPunct="1">
+      <a:defRPr sz="1200" kern="1200">
+        <a:solidFill>
+          <a:schemeClr val="tx1"/>
+        </a:solidFill>
+        <a:latin typeface="+mn-lt"/>
+        <a:ea typeface="+mn-ea"/>
+        <a:cs typeface="+mn-cs"/>
+      </a:defRPr>
+    </a:lvl5pPr>
+    <a:lvl6pPr marL="2286000" algn="l" defTabSz="914400" rtl="0" eaLnBrk="1" latinLnBrk="0" hangingPunct="1">
+      <a:defRPr sz="1200" kern="1200">
+        <a:solidFill>
+          <a:schemeClr val="tx1"/>
+        </a:solidFill>
+        <a:latin typeface="+mn-lt"/>
+        <a:ea typeface="+mn-ea"/>
+        <a:cs typeface="+mn-cs"/>
+      </a:defRPr>
+    </a:lvl6pPr>
+    <a:lvl7pPr marL="2743200" algn="l" defTabSz="914400" rtl="0" eaLnBrk="1" latinLnBrk="0" hangingPunct="1">
+      <a:defRPr sz="1200" kern="1200">
+        <a:solidFill>
+          <a:schemeClr val="tx1"/>
+        </a:solidFill>
+        <a:latin typeface="+mn-lt"/>
+        <a:ea typeface="+mn-ea"/>
+        <a:cs typeface="+mn-cs"/>
+      </a:defRPr>
+    </a:lvl7pPr>
+    <a:lvl8pPr marL="3200400" algn="l" defTabSz="914400" rtl="0" eaLnBrk="1" latinLnBrk="0" hangingPunct="1">
+      <a:defRPr sz="1200" kern="1200">
+        <a:solidFill>
+          <a:schemeClr val="tx1"/>
+        </a:solidFill>
+        <a:latin typeface="+mn-lt"/>
+        <a:ea typeface="+mn-ea"/>
+        <a:cs typeface="+mn-cs"/>
+      </a:defRPr>
+    </a:lvl8pPr>
+    <a:lvl9pPr marL="3657600" algn="l" defTabSz="914400" rtl="0" eaLnBrk="1" latinLnBrk="0" hangingPunct="1">
+      <a:defRPr sz="1200" kern="1200">
+        <a:solidFill>
+          <a:schemeClr val="tx1"/>
+        </a:solidFill>
+        <a:latin typeface="+mn-lt"/>
+        <a:ea typeface="+mn-ea"/>
+        <a:cs typeface="+mn-cs"/>
+      </a:defRPr>
+    </a:lvl9pPr>
+  </p:notesStyle>
+</p:notesMaster>
+</file>
+
+<file path=ppt/notesSlides/notesSlide1.xml><?xml version="1.0" encoding="utf-8"?>
+<p:notes xmlns:a="http://schemas.openxmlformats.org/drawingml/2006/main" xmlns:r="http://schemas.openxmlformats.org/officeDocument/2006/relationships" xmlns:p="http://schemas.openxmlformats.org/presentationml/2006/main">
+  <p:cSld>
+    <p:spTree>
+      <p:nvGrpSpPr>
+        <p:cNvPr id="1" name=""/>
+        <p:cNvGrpSpPr/>
+        <p:nvPr/>
+      </p:nvGrpSpPr>
+      <p:grpSpPr>
+        <a:xfrm>
+          <a:off x="0" y="0"/>
+          <a:ext cx="0" cy="0"/>
+          <a:chOff x="0" y="0"/>
+          <a:chExt cx="0" cy="0"/>
+        </a:xfrm>
+      </p:grpSpPr>
+      <p:sp>
+        <p:nvSpPr>
+          <p:cNvPr id="2" name="Slide Image Placeholder 1"/>
+          <p:cNvSpPr>
+            <a:spLocks noGrp="1" noRot="1" noChangeAspect="1"/>
+          </p:cNvSpPr>
+          <p:nvPr>
+            <p:ph type="sldImg"/>
+          </p:nvPr>
+        </p:nvSpPr>
+        <p:spPr/>
+      </p:sp>
+      <p:sp>
+        <p:nvSpPr>
+          <p:cNvPr id="3" name="Notes Placeholder 2"/>
+          <p:cNvSpPr>
+            <a:spLocks noGrp="1"/>
+          </p:cNvSpPr>
+          <p:nvPr>
+            <p:ph type="body" idx="1"/>
+          </p:nvPr>
+        </p:nvSpPr>
+        <p:spPr/>
+        <p:txBody>
+          <a:bodyPr/>
+          <a:lstStyle/>
+          <a:p>
+            <a:pPr lvl="0" indent="0" marL="0">
+              <a:buNone/>
+            </a:pPr>
+            <a:r>
+              <a:rPr/>
+              <a:t>Speaker notes go in a </a:t>
+            </a:r>
+            <a:r>
+              <a:rPr>
+                <a:latin typeface="Courier"/>
+              </a:rPr>
+              <a:t>notes</a:t>
+            </a:r>
+            <a:r>
+              <a:rPr/>
+              <a:t> div. They never appear on the slide: they show in PowerPoint’s presenter view, in the notes pane, and on printed notes pages.</a:t>
+            </a:r>
+          </a:p>
+          <a:p>
+            <a:pPr lvl="0" indent="0" marL="0">
+              <a:buNone/>
+            </a:pPr>
+          </a:p>
+          <a:p>
+            <a:pPr lvl="0" indent="0" marL="0">
+              <a:buNone/>
+            </a:pPr>
+            <a:r>
+              <a:rPr/>
+              <a:t>Use them for what you plan to say, the question to put to the room, and a pointer back to the handout section carrying the derivation - the slide itself should stay uncluttered.</a:t>
+            </a:r>
+          </a:p>
+        </p:txBody>
+      </p:sp>
+      <p:sp>
+        <p:nvSpPr>
+          <p:cNvPr id="4" name="Slide Number Placeholder 3"/>
+          <p:cNvSpPr>
+            <a:spLocks noGrp="1"/>
+          </p:cNvSpPr>
+          <p:nvPr>
+            <p:ph type="sldNum" sz="quarter" idx="10"/>
+          </p:nvPr>
+        </p:nvSpPr>
+        <p:spPr/>
+        <p:txBody>
+          <a:bodyPr/>
+          <a:lstStyle/>
+          <a:p>
+            <a:fld id="{18BDFEC3-8487-43E8-A154-7C12CBC1FFF2}" type="slidenum">
+              <a:rPr lang="en-US"/>
+              <a:t>3</a:t>
+            </a:fld>
+            <a:endParaRPr lang="en-US"/>
+          </a:p>
+        </p:txBody>
+      </p:sp>
+    </p:spTree>
+  </p:cSld>
+</p:notes>
+</file>
+
 <file path=ppt/slideLayouts/slideLayout1.xml><?xml version="1.0" encoding="utf-8"?>
 <p:sldLayout xmlns:a="http://schemas.openxmlformats.org/drawingml/2006/main" xmlns:r="http://schemas.openxmlformats.org/officeDocument/2006/relationships" xmlns:p="http://schemas.openxmlformats.org/presentationml/2006/main" type="title" preserve="1">
   <p:cSld name="Title Slide">
@@ -2099,15 +2558,15 @@
         </p:nvSpPr>
         <p:spPr>
           <a:xfrm>
-            <a:off x="457201" y="204787"/>
-            <a:ext cx="3008313" cy="871538"/>
+            <a:off x="457200" y="205740"/>
+            <a:ext cx="8229600" cy="874395"/>
           </a:xfrm>
         </p:spPr>
         <p:txBody>
           <a:bodyPr anchor="b"/>
           <a:lstStyle>
             <a:lvl1pPr algn="l">
-              <a:defRPr sz="1500" b="1"/>
+              <a:defRPr b="1"/>
             </a:lvl1pPr>
           </a:lstStyle>
           <a:p>
@@ -2138,31 +2597,31 @@
           <a:bodyPr/>
           <a:lstStyle>
             <a:lvl1pPr>
-              <a:defRPr sz="2400"/>
+              <a:defRPr/>
             </a:lvl1pPr>
             <a:lvl2pPr>
-              <a:defRPr sz="2100"/>
+              <a:defRPr/>
             </a:lvl2pPr>
             <a:lvl3pPr>
-              <a:defRPr sz="1800"/>
+              <a:defRPr/>
             </a:lvl3pPr>
             <a:lvl4pPr>
-              <a:defRPr sz="1500"/>
+              <a:defRPr/>
             </a:lvl4pPr>
             <a:lvl5pPr>
-              <a:defRPr sz="1500"/>
+              <a:defRPr/>
             </a:lvl5pPr>
             <a:lvl6pPr>
-              <a:defRPr sz="1500"/>
+              <a:defRPr/>
             </a:lvl6pPr>
             <a:lvl7pPr>
-              <a:defRPr sz="1500"/>
+              <a:defRPr/>
             </a:lvl7pPr>
             <a:lvl8pPr>
-              <a:defRPr sz="1500"/>
+              <a:defRPr/>
             </a:lvl8pPr>
             <a:lvl9pPr>
-              <a:defRPr sz="1500"/>
+              <a:defRPr/>
             </a:lvl9pPr>
           </a:lstStyle>
           <a:p>
@@ -2214,8 +2673,8 @@
         </p:nvSpPr>
         <p:spPr>
           <a:xfrm>
-            <a:off x="457201" y="1076326"/>
-            <a:ext cx="3008313" cy="3518297"/>
+            <a:off x="457200" y="1234440"/>
+            <a:ext cx="8229600" cy="822960"/>
           </a:xfrm>
         </p:spPr>
         <p:txBody>
@@ -2223,39 +2682,39 @@
           <a:lstStyle>
             <a:lvl1pPr marL="0" indent="0">
               <a:buNone/>
-              <a:defRPr sz="1050"/>
+              <a:defRPr/>
             </a:lvl1pPr>
             <a:lvl2pPr marL="342900" indent="0">
               <a:buNone/>
-              <a:defRPr sz="900"/>
+              <a:defRPr/>
             </a:lvl2pPr>
             <a:lvl3pPr marL="685800" indent="0">
               <a:buNone/>
-              <a:defRPr sz="750"/>
+              <a:defRPr/>
             </a:lvl3pPr>
             <a:lvl4pPr marL="1028700" indent="0">
               <a:buNone/>
-              <a:defRPr sz="675"/>
+              <a:defRPr/>
             </a:lvl4pPr>
             <a:lvl5pPr marL="1371600" indent="0">
               <a:buNone/>
-              <a:defRPr sz="675"/>
+              <a:defRPr/>
             </a:lvl5pPr>
             <a:lvl6pPr marL="1714500" indent="0">
               <a:buNone/>
-              <a:defRPr sz="675"/>
+              <a:defRPr/>
             </a:lvl6pPr>
             <a:lvl7pPr marL="2057400" indent="0">
               <a:buNone/>
-              <a:defRPr sz="675"/>
+              <a:defRPr/>
             </a:lvl7pPr>
             <a:lvl8pPr marL="2400300" indent="0">
               <a:buNone/>
-              <a:defRPr sz="675"/>
+              <a:defRPr/>
             </a:lvl8pPr>
             <a:lvl9pPr marL="2743200" indent="0">
               <a:buNone/>
-              <a:defRPr sz="675"/>
+              <a:defRPr/>
             </a:lvl9pPr>
           </a:lstStyle>
           <a:p>
@@ -2374,15 +2833,15 @@
         </p:nvSpPr>
         <p:spPr>
           <a:xfrm>
-            <a:off x="1792288" y="3600450"/>
-            <a:ext cx="5486400" cy="425054"/>
+            <a:off x="457200" y="205740"/>
+            <a:ext cx="8229600" cy="874395"/>
           </a:xfrm>
         </p:spPr>
         <p:txBody>
           <a:bodyPr anchor="b"/>
           <a:lstStyle>
             <a:lvl1pPr algn="l">
-              <a:defRPr sz="1500" b="1"/>
+              <a:defRPr b="1"/>
             </a:lvl1pPr>
           </a:lstStyle>
           <a:p>
@@ -2405,8 +2864,8 @@
         </p:nvSpPr>
         <p:spPr>
           <a:xfrm>
-            <a:off x="1792288" y="459581"/>
-            <a:ext cx="5486400" cy="3086100"/>
+            <a:off x="457200" y="1234440"/>
+            <a:ext cx="8229600" cy="822960"/>
           </a:xfrm>
         </p:spPr>
         <p:txBody>
@@ -2414,39 +2873,39 @@
           <a:lstStyle>
             <a:lvl1pPr marL="0" indent="0">
               <a:buNone/>
-              <a:defRPr sz="2400"/>
+              <a:defRPr/>
             </a:lvl1pPr>
             <a:lvl2pPr marL="342900" indent="0">
               <a:buNone/>
-              <a:defRPr sz="2100"/>
+              <a:defRPr/>
             </a:lvl2pPr>
             <a:lvl3pPr marL="685800" indent="0">
               <a:buNone/>
-              <a:defRPr sz="1800"/>
+              <a:defRPr/>
             </a:lvl3pPr>
             <a:lvl4pPr marL="1028700" indent="0">
               <a:buNone/>
-              <a:defRPr sz="1500"/>
+              <a:defRPr/>
             </a:lvl4pPr>
             <a:lvl5pPr marL="1371600" indent="0">
               <a:buNone/>
-              <a:defRPr sz="1500"/>
+              <a:defRPr/>
             </a:lvl5pPr>
             <a:lvl6pPr marL="1714500" indent="0">
               <a:buNone/>
-              <a:defRPr sz="1500"/>
+              <a:defRPr/>
             </a:lvl6pPr>
             <a:lvl7pPr marL="2057400" indent="0">
               <a:buNone/>
-              <a:defRPr sz="1500"/>
+              <a:defRPr/>
             </a:lvl7pPr>
             <a:lvl8pPr marL="2400300" indent="0">
               <a:buNone/>
-              <a:defRPr sz="1500"/>
+              <a:defRPr/>
             </a:lvl8pPr>
             <a:lvl9pPr marL="2743200" indent="0">
               <a:buNone/>
-              <a:defRPr sz="1500"/>
+              <a:defRPr/>
             </a:lvl9pPr>
           </a:lstStyle>
           <a:p>
@@ -2466,8 +2925,8 @@
         </p:nvSpPr>
         <p:spPr>
           <a:xfrm>
-            <a:off x="1792288" y="4025503"/>
-            <a:ext cx="5486400" cy="603647"/>
+            <a:off x="457200" y="1234440"/>
+            <a:ext cx="8229600" cy="822960"/>
           </a:xfrm>
         </p:spPr>
         <p:txBody>
@@ -2475,39 +2934,39 @@
           <a:lstStyle>
             <a:lvl1pPr marL="0" indent="0">
               <a:buNone/>
-              <a:defRPr sz="1050"/>
+              <a:defRPr/>
             </a:lvl1pPr>
             <a:lvl2pPr marL="342900" indent="0">
               <a:buNone/>
-              <a:defRPr sz="900"/>
+              <a:defRPr/>
             </a:lvl2pPr>
             <a:lvl3pPr marL="685800" indent="0">
               <a:buNone/>
-              <a:defRPr sz="750"/>
+              <a:defRPr/>
             </a:lvl3pPr>
             <a:lvl4pPr marL="1028700" indent="0">
               <a:buNone/>
-              <a:defRPr sz="675"/>
+              <a:defRPr/>
             </a:lvl4pPr>
             <a:lvl5pPr marL="1371600" indent="0">
               <a:buNone/>
-              <a:defRPr sz="675"/>
+              <a:defRPr/>
             </a:lvl5pPr>
             <a:lvl6pPr marL="1714500" indent="0">
               <a:buNone/>
-              <a:defRPr sz="675"/>
+              <a:defRPr/>
             </a:lvl6pPr>
             <a:lvl7pPr marL="2057400" indent="0">
               <a:buNone/>
-              <a:defRPr sz="675"/>
+              <a:defRPr/>
             </a:lvl7pPr>
             <a:lvl8pPr marL="2400300" indent="0">
               <a:buNone/>
-              <a:defRPr sz="675"/>
+              <a:defRPr/>
             </a:lvl8pPr>
             <a:lvl9pPr marL="2743200" indent="0">
               <a:buNone/>
-              <a:defRPr sz="675"/>
+              <a:defRPr/>
             </a:lvl9pPr>
           </a:lstStyle>
           <a:p>
@@ -3247,6 +3706,100 @@
 </p:sld>
 </file>
 
+<file path=ppt/slides/slide10.xml><?xml version="1.0" encoding="utf-8"?>
+<p:sld xmlns:a="http://schemas.openxmlformats.org/drawingml/2006/main" xmlns:r="http://schemas.openxmlformats.org/officeDocument/2006/relationships" xmlns:p="http://schemas.openxmlformats.org/presentationml/2006/main">
+  <p:cSld>
+    <p:spTree>
+      <p:nvGrpSpPr>
+        <p:cNvPr id="1" name=""/>
+        <p:cNvGrpSpPr/>
+        <p:nvPr/>
+      </p:nvGrpSpPr>
+      <p:grpSpPr>
+        <a:xfrm>
+          <a:off x="0" y="0"/>
+          <a:ext cx="0" cy="0"/>
+          <a:chOff x="0" y="0"/>
+          <a:chExt cx="0" cy="0"/>
+        </a:xfrm>
+      </p:grpSpPr>
+      <p:sp>
+        <p:nvSpPr>
+          <p:cNvPr id="2" name="Title 1"/>
+          <p:cNvSpPr>
+            <a:spLocks noGrp="1"/>
+          </p:cNvSpPr>
+          <p:nvPr>
+            <p:ph type="title"/>
+          </p:nvPr>
+        </p:nvSpPr>
+        <p:spPr>
+          <a:xfrm>
+            <a:off x="457200" y="205979"/>
+            <a:ext cx="8229600" cy="857250"/>
+          </a:xfrm>
+        </p:spPr>
+        <p:txBody>
+          <a:bodyPr/>
+          <a:lstStyle/>
+          <a:p>
+            <a:pPr lvl="0" indent="0" marL="0">
+              <a:buNone/>
+            </a:pPr>
+            <a:r>
+              <a:rPr/>
+              <a:t>Summary</a:t>
+            </a:r>
+          </a:p>
+        </p:txBody>
+      </p:sp>
+      <p:sp>
+        <p:nvSpPr>
+          <p:cNvPr id="3" name="Content Placeholder 2"/>
+          <p:cNvSpPr>
+            <a:spLocks noGrp="1"/>
+          </p:cNvSpPr>
+          <p:nvPr>
+            <p:ph idx="1"/>
+          </p:nvPr>
+        </p:nvSpPr>
+        <p:spPr>
+          <a:xfrm>
+            <a:off x="457200" y="1200151"/>
+            <a:ext cx="8229600" cy="3394472"/>
+          </a:xfrm>
+        </p:spPr>
+        <p:txBody>
+          <a:bodyPr/>
+          <a:lstStyle/>
+          <a:p>
+            <a:pPr lvl="0"/>
+            <a:r>
+              <a:rPr/>
+              <a:t>Regression predicts a continuous target</a:t>
+            </a:r>
+          </a:p>
+          <a:p>
+            <a:pPr lvl="0"/>
+            <a:r>
+              <a:rPr/>
+              <a:t>MSE is the standard cost function</a:t>
+            </a:r>
+          </a:p>
+          <a:p>
+            <a:pPr lvl="0"/>
+            <a:r>
+              <a:rPr/>
+              <a:t>Gradient descent scales where the normal equation does not</a:t>
+            </a:r>
+          </a:p>
+        </p:txBody>
+      </p:sp>
+    </p:spTree>
+  </p:cSld>
+</p:sld>
+</file>
+
 <file path=ppt/slides/slide2.xml><?xml version="1.0" encoding="utf-8"?>
 <p:sld xmlns:a="http://schemas.openxmlformats.org/drawingml/2006/main" xmlns:r="http://schemas.openxmlformats.org/officeDocument/2006/relationships" xmlns:p="http://schemas.openxmlformats.org/presentationml/2006/main">
   <p:cSld>
@@ -3356,7 +3909,7 @@
 </file>
 
 <file path=ppt/slides/slide3.xml><?xml version="1.0" encoding="utf-8"?>
-<p:sld xmlns:a="http://schemas.openxmlformats.org/drawingml/2006/main" xmlns:r="http://schemas.openxmlformats.org/officeDocument/2006/relationships" xmlns:p="http://schemas.openxmlformats.org/presentationml/2006/main" xmlns:a14="http://schemas.microsoft.com/office/drawing/2010/main" xmlns:m="http://schemas.openxmlformats.org/officeDocument/2006/math" xmlns:mc="http://schemas.openxmlformats.org/markup-compatibility/2006">
+<p:sld xmlns:a="http://schemas.openxmlformats.org/drawingml/2006/main" xmlns:r="http://schemas.openxmlformats.org/officeDocument/2006/relationships" xmlns:p="http://schemas.openxmlformats.org/presentationml/2006/main">
   <p:cSld>
     <p:spTree>
       <p:nvGrpSpPr>
@@ -3402,183 +3955,66 @@
           </a:p>
         </p:txBody>
       </p:sp>
-      <mc:AlternateContent xmlns:mc="http://schemas.openxmlformats.org/markup-compatibility/2006">
-        <mc:Choice xmlns:a14="http://schemas.microsoft.com/office/drawing/2010/main" Requires="a14">
-          <p:sp>
-            <p:nvSpPr>
-              <p:cNvPr id="3" name="Content Placeholder 2"/>
-              <p:cNvSpPr>
-                <a:spLocks noGrp="1"/>
-              </p:cNvSpPr>
-              <p:nvPr>
-                <p:ph idx="1"/>
-              </p:nvPr>
-            </p:nvSpPr>
-            <p:spPr/>
-            <p:txBody>
-              <a:bodyPr/>
-              <a:lstStyle/>
-              <a:p>
-                <a:pPr lvl="0" indent="0" marL="0">
-                  <a:buNone/>
-                </a:pPr>
-                <a:r>
-                  <a:rPr/>
-                  <a:t>We want a function that maps features to a continuous target.</a:t>
-                </a:r>
-              </a:p>
-              <a:p>
-                <a:pPr lvl="0"/>
-                <a:r>
-                  <a:rPr/>
-                  <a:t>Input: </a:t>
-                </a:r>
-                <a14:m>
-                  <m:oMath xmlns:m="http://schemas.openxmlformats.org/officeDocument/2006/math">
-                    <m:r>
-                      <m:t>x</m:t>
-                    </m:r>
-                    <m:r>
-                      <m:rPr>
-                        <m:sty m:val="p"/>
-                      </m:rPr>
-                      <m:t>∈</m:t>
-                    </m:r>
-                    <m:sSup>
-                      <m:e>
-                        <m:r>
-                          <m:rPr>
-                            <m:sty m:val="p"/>
-                            <m:scr m:val="double-struck"/>
-                          </m:rPr>
-                          <m:t>R</m:t>
-                        </m:r>
-                      </m:e>
-                      <m:sup>
-                        <m:r>
-                          <m:t>n</m:t>
-                        </m:r>
-                      </m:sup>
-                    </m:sSup>
-                  </m:oMath>
-                </a14:m>
-              </a:p>
-              <a:p>
-                <a:pPr lvl="0"/>
-                <a:r>
-                  <a:rPr/>
-                  <a:t>Output: </a:t>
-                </a:r>
-                <a14:m>
-                  <m:oMath xmlns:m="http://schemas.openxmlformats.org/officeDocument/2006/math">
-                    <m:r>
-                      <m:t>y</m:t>
-                    </m:r>
-                    <m:r>
-                      <m:rPr>
-                        <m:sty m:val="p"/>
-                      </m:rPr>
-                      <m:t>∈</m:t>
-                    </m:r>
-                    <m:r>
-                      <m:rPr>
-                        <m:sty m:val="p"/>
-                        <m:scr m:val="double-struck"/>
-                      </m:rPr>
-                      <m:t>R</m:t>
-                    </m:r>
-                  </m:oMath>
-                </a14:m>
-              </a:p>
-              <a:p>
-                <a:pPr lvl="0"/>
-                <a:r>
-                  <a:rPr/>
-                  <a:t>Model: </a:t>
-                </a:r>
-                <a14:m>
-                  <m:oMath xmlns:m="http://schemas.openxmlformats.org/officeDocument/2006/math">
-                    <m:acc>
-                      <m:accPr>
-                        <m:chr m:val="̂"/>
-                      </m:accPr>
-                      <m:e>
-                        <m:r>
-                          <m:t>y</m:t>
-                        </m:r>
-                      </m:e>
-                    </m:acc>
-                    <m:r>
-                      <m:rPr>
-                        <m:sty m:val="p"/>
-                      </m:rPr>
-                      <m:t>=</m:t>
-                    </m:r>
-                    <m:sSup>
-                      <m:e>
-                        <m:r>
-                          <m:t>w</m:t>
-                        </m:r>
-                      </m:e>
-                      <m:sup>
-                        <m:r>
-                          <m:rPr>
-                            <m:sty m:val="p"/>
-                          </m:rPr>
-                          <m:t>⊤</m:t>
-                        </m:r>
-                      </m:sup>
-                    </m:sSup>
-                    <m:r>
-                      <m:t>x</m:t>
-                    </m:r>
-                    <m:r>
-                      <m:rPr>
-                        <m:sty m:val="p"/>
-                      </m:rPr>
-                      <m:t>+</m:t>
-                    </m:r>
-                    <m:r>
-                      <m:t>b</m:t>
-                    </m:r>
-                  </m:oMath>
-                </a14:m>
-              </a:p>
-              <a:p>
-                <a:pPr lvl="0" indent="0" marL="0">
-                  <a:buNone/>
-                </a:pPr>
-                <a:r>
-                  <a:rPr/>
-                  <a:t>The parameters </a:t>
-                </a:r>
-                <a14:m>
-                  <m:oMath xmlns:m="http://schemas.openxmlformats.org/officeDocument/2006/math">
-                    <m:r>
-                      <m:t>w</m:t>
-                    </m:r>
-                  </m:oMath>
-                </a14:m>
-                <a:r>
-                  <a:rPr/>
-                  <a:t> and </a:t>
-                </a:r>
-                <a14:m>
-                  <m:oMath xmlns:m="http://schemas.openxmlformats.org/officeDocument/2006/math">
-                    <m:r>
-                      <m:t>b</m:t>
-                    </m:r>
-                  </m:oMath>
-                </a14:m>
-                <a:r>
-                  <a:rPr/>
-                  <a:t> are learned from data.</a:t>
-                </a:r>
-              </a:p>
-            </p:txBody>
-          </p:sp>
-        </mc:Choice>
-      </mc:AlternateContent>
+      <p:sp>
+        <p:nvSpPr>
+          <p:cNvPr id="3" name="Content Placeholder 2"/>
+          <p:cNvSpPr>
+            <a:spLocks noGrp="1"/>
+          </p:cNvSpPr>
+          <p:nvPr>
+            <p:ph idx="1"/>
+          </p:nvPr>
+        </p:nvSpPr>
+        <p:spPr>
+          <a:xfrm>
+            <a:off x="457200" y="1200151"/>
+            <a:ext cx="8229600" cy="3394472"/>
+          </a:xfrm>
+        </p:spPr>
+        <p:txBody>
+          <a:bodyPr/>
+          <a:lstStyle/>
+          <a:p>
+            <a:pPr lvl="0" indent="0" marL="0">
+              <a:buNone/>
+            </a:pPr>
+            <a:r>
+              <a:rPr/>
+              <a:t>We want a function that maps features to a continuous target.</a:t>
+            </a:r>
+          </a:p>
+          <a:p>
+            <a:pPr lvl="0"/>
+            <a:r>
+              <a:rPr/>
+              <a:t>Input: x ∈ ℝⁿ</a:t>
+            </a:r>
+          </a:p>
+          <a:p>
+            <a:pPr lvl="0"/>
+            <a:r>
+              <a:rPr/>
+              <a:t>Output: y ∈ ℝ</a:t>
+            </a:r>
+          </a:p>
+          <a:p>
+            <a:pPr lvl="0"/>
+            <a:r>
+              <a:rPr/>
+              <a:t>Model: y = wᵀ x + b</a:t>
+            </a:r>
+          </a:p>
+          <a:p>
+            <a:pPr lvl="0" indent="0" marL="0">
+              <a:buNone/>
+            </a:pPr>
+            <a:r>
+              <a:rPr/>
+              <a:t>The parameters w and b are learned from data.</a:t>
+            </a:r>
+          </a:p>
+        </p:txBody>
+      </p:sp>
     </p:spTree>
   </p:cSld>
 </p:sld>
@@ -3647,8 +4083,8 @@
         </p:blipFill>
         <p:spPr bwMode="auto">
           <a:xfrm>
-            <a:off x="1270000" y="1193800"/>
-            <a:ext cx="6604000" cy="2882900"/>
+            <a:off x="1783757" y="2091929"/>
+            <a:ext cx="5576486" cy="2434351"/>
           </a:xfrm>
           <a:prstGeom prst="rect">
             <a:avLst/>
@@ -3669,8 +4105,8 @@
         </p:nvSpPr>
         <p:spPr>
           <a:xfrm>
-            <a:off x="457200" y="4076700"/>
-            <a:ext cx="8229600" cy="508000"/>
+            <a:off x="457200" y="1166099"/>
+            <a:ext cx="8229600" cy="822960"/>
           </a:xfrm>
           <a:prstGeom prst="rect">
             <a:avLst/>
@@ -3697,7 +4133,7 @@
 </file>
 
 <file path=ppt/slides/slide5.xml><?xml version="1.0" encoding="utf-8"?>
-<p:sld xmlns:a="http://schemas.openxmlformats.org/drawingml/2006/main" xmlns:r="http://schemas.openxmlformats.org/officeDocument/2006/relationships" xmlns:p="http://schemas.openxmlformats.org/presentationml/2006/main" xmlns:a14="http://schemas.microsoft.com/office/drawing/2010/main" xmlns:m="http://schemas.openxmlformats.org/officeDocument/2006/math" xmlns:mc="http://schemas.openxmlformats.org/markup-compatibility/2006">
+<p:sld xmlns:a="http://schemas.openxmlformats.org/drawingml/2006/main" xmlns:r="http://schemas.openxmlformats.org/officeDocument/2006/relationships" xmlns:p="http://schemas.openxmlformats.org/presentationml/2006/main">
   <p:cSld>
     <p:spTree>
       <p:nvGrpSpPr>
@@ -3725,8 +4161,8 @@
         </p:nvSpPr>
         <p:spPr>
           <a:xfrm>
-            <a:off x="457200" y="205979"/>
-            <a:ext cx="8229600" cy="857250"/>
+            <a:off x="457200" y="205740"/>
+            <a:ext cx="8229600" cy="874395"/>
           </a:xfrm>
         </p:spPr>
         <p:txBody>
@@ -3743,253 +4179,125 @@
           </a:p>
         </p:txBody>
       </p:sp>
-      <mc:AlternateContent xmlns:mc="http://schemas.openxmlformats.org/markup-compatibility/2006">
-        <mc:Choice xmlns:a14="http://schemas.microsoft.com/office/drawing/2010/main" Requires="a14">
-          <p:sp>
-            <p:nvSpPr>
-              <p:cNvPr id="3" name="Content Placeholder 2"/>
-              <p:cNvSpPr>
-                <a:spLocks noGrp="1"/>
-              </p:cNvSpPr>
-              <p:nvPr>
-                <p:ph idx="1"/>
-              </p:nvPr>
-            </p:nvSpPr>
-            <p:spPr/>
-            <p:txBody>
-              <a:bodyPr/>
-              <a:lstStyle/>
-              <a:p>
-                <a:pPr lvl="0" indent="0" marL="0">
-                  <a:buNone/>
-                </a:pPr>
-                <a:r>
-                  <a:rPr/>
-                  <a:t>The mean squared error over </a:t>
-                </a:r>
-                <a14:m>
-                  <m:oMath xmlns:m="http://schemas.openxmlformats.org/officeDocument/2006/math">
-                    <m:r>
-                      <m:t>m</m:t>
-                    </m:r>
-                  </m:oMath>
-                </a14:m>
-                <a:r>
-                  <a:rPr/>
-                  <a:t> examples:</a:t>
-                </a:r>
-              </a:p>
-              <a:p>
-                <a:pPr lvl="0" indent="0" marL="0">
-                  <a:buNone/>
-                </a:pPr>
-                <a14:m>
-                  <m:oMathPara xmlns:m="http://schemas.openxmlformats.org/officeDocument/2006/math">
-                    <m:oMathParaPr>
-                      <m:jc m:val="center"/>
-                    </m:oMathParaPr>
-                    <m:oMath>
-                      <m:r>
-                        <m:t>J</m:t>
-                      </m:r>
-                      <m:d>
-                        <m:dPr>
-                          <m:begChr m:val="("/>
-                          <m:sepChr m:val=""/>
-                          <m:endChr m:val=")"/>
-                          <m:grow/>
-                        </m:dPr>
-                        <m:e>
-                          <m:r>
-                            <m:t>w</m:t>
-                          </m:r>
-                          <m:r>
-                            <m:rPr>
-                              <m:sty m:val="p"/>
-                            </m:rPr>
-                            <m:t>,</m:t>
-                          </m:r>
-                          <m:r>
-                            <m:t>b</m:t>
-                          </m:r>
-                        </m:e>
-                      </m:d>
-                      <m:r>
-                        <m:rPr>
-                          <m:sty m:val="p"/>
-                        </m:rPr>
-                        <m:t>=</m:t>
-                      </m:r>
-                      <m:f>
-                        <m:fPr>
-                          <m:type m:val="bar"/>
-                        </m:fPr>
-                        <m:num>
-                          <m:r>
-                            <m:t>1</m:t>
-                          </m:r>
-                        </m:num>
-                        <m:den>
-                          <m:r>
-                            <m:t>2</m:t>
-                          </m:r>
-                          <m:r>
-                            <m:t>m</m:t>
-                          </m:r>
-                        </m:den>
-                      </m:f>
-                      <m:nary>
-                        <m:naryPr>
-                          <m:chr m:val="∑"/>
-                          <m:limLoc m:val="undOvr"/>
-                          <m:subHide m:val="off"/>
-                          <m:supHide m:val="off"/>
-                        </m:naryPr>
-                        <m:sub>
-                          <m:r>
-                            <m:t>i</m:t>
-                          </m:r>
-                          <m:r>
-                            <m:rPr>
-                              <m:sty m:val="p"/>
-                            </m:rPr>
-                            <m:t>=</m:t>
-                          </m:r>
-                          <m:r>
-                            <m:t>1</m:t>
-                          </m:r>
-                        </m:sub>
-                        <m:sup>
-                          <m:r>
-                            <m:t>m</m:t>
-                          </m:r>
-                        </m:sup>
-                        <m:e>
-                          <m:sSup>
-                            <m:e>
-                              <m:d>
-                                <m:dPr>
-                                  <m:begChr m:val="("/>
-                                  <m:sepChr m:val=""/>
-                                  <m:endChr m:val=")"/>
-                                  <m:grow/>
-                                </m:dPr>
-                                <m:e>
-                                  <m:sSup>
-                                    <m:e>
-                                      <m:acc>
-                                        <m:accPr>
-                                          <m:chr m:val="̂"/>
-                                        </m:accPr>
-                                        <m:e>
-                                          <m:r>
-                                            <m:t>y</m:t>
-                                          </m:r>
-                                        </m:e>
-                                      </m:acc>
-                                    </m:e>
-                                    <m:sup>
-                                      <m:d>
-                                        <m:dPr>
-                                          <m:begChr m:val="("/>
-                                          <m:sepChr m:val=""/>
-                                          <m:endChr m:val=")"/>
-                                          <m:grow/>
-                                        </m:dPr>
-                                        <m:e>
-                                          <m:r>
-                                            <m:t>i</m:t>
-                                          </m:r>
-                                        </m:e>
-                                      </m:d>
-                                    </m:sup>
-                                  </m:sSup>
-                                  <m:r>
-                                    <m:rPr>
-                                      <m:sty m:val="p"/>
-                                    </m:rPr>
-                                    <m:t>−</m:t>
-                                  </m:r>
-                                  <m:sSup>
-                                    <m:e>
-                                      <m:r>
-                                        <m:t>y</m:t>
-                                      </m:r>
-                                    </m:e>
-                                    <m:sup>
-                                      <m:d>
-                                        <m:dPr>
-                                          <m:begChr m:val="("/>
-                                          <m:sepChr m:val=""/>
-                                          <m:endChr m:val=")"/>
-                                          <m:grow/>
-                                        </m:dPr>
-                                        <m:e>
-                                          <m:r>
-                                            <m:t>i</m:t>
-                                          </m:r>
-                                        </m:e>
-                                      </m:d>
-                                    </m:sup>
-                                  </m:sSup>
-                                </m:e>
-                              </m:d>
-                            </m:e>
-                            <m:sup>
-                              <m:r>
-                                <m:t>2</m:t>
-                              </m:r>
-                            </m:sup>
-                          </m:sSup>
-                        </m:e>
-                      </m:nary>
-                    </m:oMath>
-                  </m:oMathPara>
-                </a14:m>
-              </a:p>
-              <a:p>
-                <a:pPr lvl="0" indent="0" marL="0">
-                  <a:buNone/>
-                </a:pPr>
-                <a:r>
-                  <a:rPr/>
-                  <a:t>The factor </a:t>
-                </a:r>
-                <a14:m>
-                  <m:oMath xmlns:m="http://schemas.openxmlformats.org/officeDocument/2006/math">
-                    <m:f>
-                      <m:fPr>
-                        <m:type m:val="lin"/>
-                      </m:fPr>
-                      <m:num>
-                        <m:r>
-                          <m:t>1</m:t>
-                        </m:r>
-                      </m:num>
-                      <m:den>
-                        <m:r>
-                          <m:t>2</m:t>
-                        </m:r>
-                      </m:den>
-                    </m:f>
-                  </m:oMath>
-                </a14:m>
-                <a:r>
-                  <a:rPr/>
-                  <a:t> simplifies the derivative.</a:t>
-                </a:r>
-              </a:p>
-            </p:txBody>
-          </p:sp>
-        </mc:Choice>
-      </mc:AlternateContent>
+      <p:sp>
+        <p:nvSpPr>
+          <p:cNvPr id="4" name="Text Placeholder 3"/>
+          <p:cNvSpPr>
+            <a:spLocks noGrp="1"/>
+          </p:cNvSpPr>
+          <p:nvPr>
+            <p:ph idx="2" sz="half" type="body"/>
+          </p:nvPr>
+        </p:nvSpPr>
+        <p:spPr>
+          <a:xfrm>
+            <a:off x="457200" y="1183005"/>
+            <a:ext cx="8229600" cy="822960"/>
+          </a:xfrm>
+        </p:spPr>
+        <p:txBody>
+          <a:bodyPr/>
+          <a:lstStyle/>
+          <a:p>
+            <a:pPr lvl="0" indent="0" marL="0">
+              <a:buNone/>
+            </a:pPr>
+            <a:r>
+              <a:rPr/>
+              <a:t>The mean squared error over m examples:</a:t>
+            </a:r>
+          </a:p>
+        </p:txBody>
+      </p:sp>
+      <p:pic>
+        <p:nvPicPr>
+          <p:cNvPr descr="eq_51ec599655.png" id="0" name="Picture 1"/>
+          <p:cNvPicPr>
+            <a:picLocks noGrp="1" noChangeAspect="1"/>
+          </p:cNvPicPr>
+          <p:nvPr/>
+        </p:nvPicPr>
+        <p:blipFill>
+          <a:blip r:embed="rId2"/>
+          <a:stretch>
+            <a:fillRect/>
+          </a:stretch>
+        </p:blipFill>
+        <p:spPr bwMode="auto">
+          <a:xfrm>
+            <a:off x="457200" y="2375862"/>
+            <a:ext cx="8229599" cy="1883391"/>
+          </a:xfrm>
+          <a:prstGeom prst="rect">
+            <a:avLst/>
+          </a:prstGeom>
+          <a:noFill/>
+          <a:ln w="9525">
+            <a:noFill/>
+            <a:headEnd/>
+            <a:tailEnd/>
+          </a:ln>
+        </p:spPr>
+      </p:pic>
     </p:spTree>
   </p:cSld>
 </p:sld>
 </file>
 
 <file path=ppt/slides/slide6.xml><?xml version="1.0" encoding="utf-8"?>
-<p:sld xmlns:a="http://schemas.openxmlformats.org/drawingml/2006/main" xmlns:r="http://schemas.openxmlformats.org/officeDocument/2006/relationships" xmlns:p="http://schemas.openxmlformats.org/presentationml/2006/main" xmlns:a14="http://schemas.microsoft.com/office/drawing/2010/main" xmlns:m="http://schemas.openxmlformats.org/officeDocument/2006/math">
+<p:sld xmlns:a="http://schemas.openxmlformats.org/drawingml/2006/main" xmlns:r="http://schemas.openxmlformats.org/officeDocument/2006/relationships" xmlns:p="http://schemas.openxmlformats.org/presentationml/2006/main">
+  <p:cSld>
+    <p:spTree>
+      <p:nvGrpSpPr>
+        <p:cNvPr id="1" name=""/>
+        <p:cNvGrpSpPr/>
+        <p:nvPr/>
+      </p:nvGrpSpPr>
+      <p:grpSpPr>
+        <a:xfrm>
+          <a:off x="0" y="0"/>
+          <a:ext cx="0" cy="0"/>
+          <a:chOff x="0" y="0"/>
+          <a:chExt cx="0" cy="0"/>
+        </a:xfrm>
+      </p:grpSpPr>
+      <p:sp>
+        <p:nvSpPr>
+          <p:cNvPr id="3" name="Content Placeholder 2"/>
+          <p:cNvSpPr>
+            <a:spLocks noGrp="1"/>
+          </p:cNvSpPr>
+          <p:nvPr>
+            <p:ph idx="1"/>
+          </p:nvPr>
+        </p:nvSpPr>
+        <p:spPr>
+          <a:xfrm>
+            <a:off x="457200" y="1200151"/>
+            <a:ext cx="8229600" cy="3394472"/>
+          </a:xfrm>
+        </p:spPr>
+        <p:txBody>
+          <a:bodyPr/>
+          <a:lstStyle/>
+          <a:p>
+            <a:pPr lvl="0" indent="0" marL="0">
+              <a:buNone/>
+            </a:pPr>
+            <a:r>
+              <a:rPr/>
+              <a:t>The factor  simplifies the derivative.</a:t>
+            </a:r>
+          </a:p>
+        </p:txBody>
+      </p:sp>
+    </p:spTree>
+  </p:cSld>
+</p:sld>
+</file>
+
+<file path=ppt/slides/slide7.xml><?xml version="1.0" encoding="utf-8"?>
+<p:sld xmlns:a="http://schemas.openxmlformats.org/drawingml/2006/main" xmlns:r="http://schemas.openxmlformats.org/officeDocument/2006/relationships" xmlns:p="http://schemas.openxmlformats.org/presentationml/2006/main">
   <p:cSld>
     <p:spTree>
       <p:nvGrpSpPr>
@@ -4104,15 +4412,8 @@
                       </a:pPr>
                       <a:r>
                         <a:rPr/>
-                        <a:t>Scales to large </a:t>
+                        <a:t>Scales to large n</a:t>
                       </a:r>
-                      <a14:m>
-                        <m:oMath xmlns:m="http://schemas.openxmlformats.org/officeDocument/2006/math">
-                          <m:r>
-                            <m:t>n</m:t>
-                          </m:r>
-                        </m:oMath>
-                      </a14:m>
                     </a:p>
                   </a:txBody>
                   <a:tcPr/>
@@ -4329,160 +4630,6 @@
 </p:sld>
 </file>
 
-<file path=ppt/slides/slide7.xml><?xml version="1.0" encoding="utf-8"?>
-<p:sld xmlns:a="http://schemas.openxmlformats.org/drawingml/2006/main" xmlns:r="http://schemas.openxmlformats.org/officeDocument/2006/relationships" xmlns:p="http://schemas.openxmlformats.org/presentationml/2006/main">
-  <p:cSld>
-    <p:spTree>
-      <p:nvGrpSpPr>
-        <p:cNvPr id="1" name=""/>
-        <p:cNvGrpSpPr/>
-        <p:nvPr/>
-      </p:nvGrpSpPr>
-      <p:grpSpPr>
-        <a:xfrm>
-          <a:off x="0" y="0"/>
-          <a:ext cx="0" cy="0"/>
-          <a:chOff x="0" y="0"/>
-          <a:chExt cx="0" cy="0"/>
-        </a:xfrm>
-      </p:grpSpPr>
-      <p:sp>
-        <p:nvSpPr>
-          <p:cNvPr id="2" name="Title 1"/>
-          <p:cNvSpPr>
-            <a:spLocks noGrp="1"/>
-          </p:cNvSpPr>
-          <p:nvPr>
-            <p:ph type="title"/>
-          </p:nvPr>
-        </p:nvSpPr>
-        <p:spPr>
-          <a:xfrm>
-            <a:off x="457200" y="205979"/>
-            <a:ext cx="8229600" cy="857250"/>
-          </a:xfrm>
-        </p:spPr>
-        <p:txBody>
-          <a:bodyPr/>
-          <a:lstStyle/>
-          <a:p>
-            <a:pPr lvl="0" indent="0" marL="0">
-              <a:buNone/>
-            </a:pPr>
-            <a:r>
-              <a:rPr/>
-              <a:t>Implementation</a:t>
-            </a:r>
-          </a:p>
-        </p:txBody>
-      </p:sp>
-      <p:sp>
-        <p:nvSpPr>
-          <p:cNvPr id="3" name="Content Placeholder 2"/>
-          <p:cNvSpPr>
-            <a:spLocks noGrp="1"/>
-          </p:cNvSpPr>
-          <p:nvPr>
-            <p:ph idx="1"/>
-          </p:nvPr>
-        </p:nvSpPr>
-        <p:spPr>
-          <a:xfrm>
-            <a:off x="457200" y="1200151"/>
-            <a:ext cx="8229600" cy="3394472"/>
-          </a:xfrm>
-        </p:spPr>
-        <p:txBody>
-          <a:bodyPr/>
-          <a:lstStyle/>
-          <a:p>
-            <a:pPr lvl="0" indent="0">
-              <a:buNone/>
-            </a:pPr>
-            <a:r>
-              <a:rPr b="1">
-                <a:solidFill>
-                  <a:srgbClr val="008000"/>
-                </a:solidFill>
-                <a:latin typeface="Courier"/>
-              </a:rPr>
-              <a:t>from</a:t>
-            </a:r>
-            <a:r>
-              <a:rPr>
-                <a:latin typeface="Courier"/>
-              </a:rPr>
-              <a:t> sklearn.linear_model </a:t>
-            </a:r>
-            <a:r>
-              <a:rPr b="1">
-                <a:solidFill>
-                  <a:srgbClr val="008000"/>
-                </a:solidFill>
-                <a:latin typeface="Courier"/>
-              </a:rPr>
-              <a:t>import</a:t>
-            </a:r>
-            <a:r>
-              <a:rPr>
-                <a:latin typeface="Courier"/>
-              </a:rPr>
-              <a:t> LinearRegression</a:t>
-            </a:r>
-            <a:br/>
-            <a:br/>
-            <a:r>
-              <a:rPr>
-                <a:latin typeface="Courier"/>
-              </a:rPr>
-              <a:t>model </a:t>
-            </a:r>
-            <a:r>
-              <a:rPr>
-                <a:solidFill>
-                  <a:srgbClr val="666666"/>
-                </a:solidFill>
-                <a:latin typeface="Courier"/>
-              </a:rPr>
-              <a:t>=</a:t>
-            </a:r>
-            <a:r>
-              <a:rPr>
-                <a:latin typeface="Courier"/>
-              </a:rPr>
-              <a:t> LinearRegression()</a:t>
-            </a:r>
-            <a:br/>
-            <a:r>
-              <a:rPr>
-                <a:latin typeface="Courier"/>
-              </a:rPr>
-              <a:t>model.fit(X_train, y_train)</a:t>
-            </a:r>
-            <a:br/>
-            <a:r>
-              <a:rPr>
-                <a:solidFill>
-                  <a:srgbClr val="008000"/>
-                </a:solidFill>
-                <a:latin typeface="Courier"/>
-              </a:rPr>
-              <a:t>print</a:t>
-            </a:r>
-            <a:r>
-              <a:rPr>
-                <a:latin typeface="Courier"/>
-              </a:rPr>
-              <a:t>(model.coef_, model.intercept_)</a:t>
-            </a:r>
-          </a:p>
-        </p:txBody>
-      </p:sp>
-    </p:spTree>
-  </p:cSld>
-</p:sld>
-</file>
-
 <file path=ppt/slides/slide8.xml><?xml version="1.0" encoding="utf-8"?>
 <p:sld xmlns:a="http://schemas.openxmlformats.org/drawingml/2006/main" xmlns:r="http://schemas.openxmlformats.org/officeDocument/2006/relationships" xmlns:p="http://schemas.openxmlformats.org/presentationml/2006/main">
   <p:cSld>
@@ -4525,7 +4672,7 @@
             </a:pPr>
             <a:r>
               <a:rPr/>
-              <a:t>Two-column layout</a:t>
+              <a:t>Implementation</a:t>
             </a:r>
           </a:p>
         </p:txBody>
@@ -4537,83 +4684,97 @@
             <a:spLocks noGrp="1"/>
           </p:cNvSpPr>
           <p:nvPr>
-            <p:ph idx="1" sz="half"/>
+            <p:ph idx="1"/>
           </p:nvPr>
         </p:nvSpPr>
         <p:spPr>
           <a:xfrm>
             <a:off x="457200" y="1200151"/>
-            <a:ext cx="4038600" cy="3394472"/>
+            <a:ext cx="8229600" cy="3394472"/>
           </a:xfrm>
         </p:spPr>
         <p:txBody>
           <a:bodyPr/>
           <a:lstStyle/>
           <a:p>
-            <a:pPr lvl="0" indent="0" marL="0">
+            <a:pPr lvl="0" indent="0">
               <a:buNone/>
             </a:pPr>
             <a:r>
-              <a:rPr b="1"/>
-              <a:t>Underfitting</a:t>
-            </a:r>
-          </a:p>
-          <a:p>
-            <a:pPr lvl="0"/>
-            <a:r>
-              <a:rPr/>
-              <a:t>High bias</a:t>
-            </a:r>
-          </a:p>
-          <a:p>
-            <a:pPr lvl="0"/>
-            <a:r>
-              <a:rPr/>
-              <a:t>Poor on train and test</a:t>
-            </a:r>
-          </a:p>
-        </p:txBody>
-      </p:sp>
-      <p:sp>
-        <p:nvSpPr>
-          <p:cNvPr id="4" name="Content Placeholder 3"/>
-          <p:cNvSpPr>
-            <a:spLocks noGrp="1"/>
-          </p:cNvSpPr>
-          <p:nvPr>
-            <p:ph idx="2" sz="half"/>
-          </p:nvPr>
-        </p:nvSpPr>
-        <p:spPr>
-          <a:xfrm>
-            <a:off x="4648200" y="1200151"/>
-            <a:ext cx="4038600" cy="3394472"/>
-          </a:xfrm>
-        </p:spPr>
-        <p:txBody>
-          <a:bodyPr/>
-          <a:lstStyle/>
-          <a:p>
-            <a:pPr lvl="0" indent="0" marL="0">
-              <a:buNone/>
-            </a:pPr>
-            <a:r>
-              <a:rPr b="1"/>
-              <a:t>Overfitting</a:t>
-            </a:r>
-          </a:p>
-          <a:p>
-            <a:pPr lvl="0"/>
-            <a:r>
-              <a:rPr/>
-              <a:t>High variance</a:t>
-            </a:r>
-          </a:p>
-          <a:p>
-            <a:pPr lvl="0"/>
-            <a:r>
-              <a:rPr/>
-              <a:t>Great on train, poor on test</a:t>
+              <a:rPr b="1">
+                <a:solidFill>
+                  <a:srgbClr val="008000"/>
+                </a:solidFill>
+                <a:latin typeface="Courier"/>
+              </a:rPr>
+              <a:t>from</a:t>
+            </a:r>
+            <a:r>
+              <a:rPr>
+                <a:latin typeface="Courier"/>
+              </a:rPr>
+              <a:t> sklearn.linear_model </a:t>
+            </a:r>
+            <a:r>
+              <a:rPr b="1">
+                <a:solidFill>
+                  <a:srgbClr val="008000"/>
+                </a:solidFill>
+                <a:latin typeface="Courier"/>
+              </a:rPr>
+              <a:t>import</a:t>
+            </a:r>
+            <a:r>
+              <a:rPr>
+                <a:latin typeface="Courier"/>
+              </a:rPr>
+              <a:t> LinearRegression</a:t>
+            </a:r>
+            <a:br/>
+            <a:br/>
+            <a:r>
+              <a:rPr>
+                <a:latin typeface="Courier"/>
+              </a:rPr>
+              <a:t>model </a:t>
+            </a:r>
+            <a:r>
+              <a:rPr>
+                <a:solidFill>
+                  <a:srgbClr val="666666"/>
+                </a:solidFill>
+                <a:latin typeface="Courier"/>
+              </a:rPr>
+              <a:t>=</a:t>
+            </a:r>
+            <a:r>
+              <a:rPr>
+                <a:latin typeface="Courier"/>
+              </a:rPr>
+              <a:t> LinearRegression()</a:t>
+            </a:r>
+            <a:br/>
+            <a:r>
+              <a:rPr>
+                <a:latin typeface="Courier"/>
+              </a:rPr>
+              <a:t>model.fit(X_train, y_train)</a:t>
+            </a:r>
+            <a:br/>
+            <a:r>
+              <a:rPr>
+                <a:solidFill>
+                  <a:srgbClr val="008000"/>
+                </a:solidFill>
+                <a:latin typeface="Courier"/>
+              </a:rPr>
+              <a:t>print</a:t>
+            </a:r>
+            <a:r>
+              <a:rPr>
+                <a:latin typeface="Courier"/>
+              </a:rPr>
+              <a:t>(model.coef_, model.intercept_)</a:t>
             </a:r>
           </a:p>
         </p:txBody>
@@ -4665,7 +4826,7 @@
             </a:pPr>
             <a:r>
               <a:rPr/>
-              <a:t>Summary</a:t>
+              <a:t>Two-column layout</a:t>
             </a:r>
           </a:p>
         </p:txBody>
@@ -4677,37 +4838,83 @@
             <a:spLocks noGrp="1"/>
           </p:cNvSpPr>
           <p:nvPr>
-            <p:ph idx="1"/>
+            <p:ph idx="1" sz="half"/>
           </p:nvPr>
         </p:nvSpPr>
         <p:spPr>
           <a:xfrm>
             <a:off x="457200" y="1200151"/>
-            <a:ext cx="8229600" cy="3394472"/>
+            <a:ext cx="4038600" cy="3394472"/>
           </a:xfrm>
         </p:spPr>
         <p:txBody>
           <a:bodyPr/>
           <a:lstStyle/>
           <a:p>
+            <a:pPr lvl="0" indent="0" marL="0">
+              <a:buNone/>
+            </a:pPr>
+            <a:r>
+              <a:rPr b="1"/>
+              <a:t>Underfitting</a:t>
+            </a:r>
+          </a:p>
+          <a:p>
             <a:pPr lvl="0"/>
             <a:r>
               <a:rPr/>
-              <a:t>Regression predicts a continuous target</a:t>
+              <a:t>High bias</a:t>
             </a:r>
           </a:p>
           <a:p>
             <a:pPr lvl="0"/>
             <a:r>
               <a:rPr/>
-              <a:t>MSE is the standard cost function</a:t>
+              <a:t>Poor on train and test</a:t>
+            </a:r>
+          </a:p>
+        </p:txBody>
+      </p:sp>
+      <p:sp>
+        <p:nvSpPr>
+          <p:cNvPr id="4" name="Content Placeholder 3"/>
+          <p:cNvSpPr>
+            <a:spLocks noGrp="1"/>
+          </p:cNvSpPr>
+          <p:nvPr>
+            <p:ph idx="2" sz="half"/>
+          </p:nvPr>
+        </p:nvSpPr>
+        <p:spPr>
+          <a:xfrm>
+            <a:off x="4648200" y="1200151"/>
+            <a:ext cx="4038600" cy="3394472"/>
+          </a:xfrm>
+        </p:spPr>
+        <p:txBody>
+          <a:bodyPr/>
+          <a:lstStyle/>
+          <a:p>
+            <a:pPr lvl="0" indent="0" marL="0">
+              <a:buNone/>
+            </a:pPr>
+            <a:r>
+              <a:rPr b="1"/>
+              <a:t>Overfitting</a:t>
             </a:r>
           </a:p>
           <a:p>
             <a:pPr lvl="0"/>
             <a:r>
               <a:rPr/>
-              <a:t>Gradient descent scales where the normal equation does not</a:t>
+              <a:t>High variance</a:t>
+            </a:r>
+          </a:p>
+          <a:p>
+            <a:pPr lvl="0"/>
+            <a:r>
+              <a:rPr/>
+              <a:t>Great on train, poor on test</a:t>
             </a:r>
           </a:p>
         </p:txBody>
@@ -5035,4 +5242,265 @@
   </a:objectDefaults>
   <a:extraClrSchemeLst/>
 </a:theme>
+</file>
+
+<file path=ppt/theme/theme2.xml><?xml version="1.0" encoding="utf-8"?>
+<a:theme xmlns:a="http://schemas.openxmlformats.org/drawingml/2006/main" name="Office Theme">
+  <a:themeElements>
+    <a:clrScheme name="Office">
+      <a:dk1>
+        <a:sysClr val="windowText" lastClr="1A1A1A"/>
+      </a:dk1>
+      <a:lt1>
+        <a:sysClr val="window" lastClr="FFFFFF"/>
+      </a:lt1>
+      <a:dk2>
+        <a:srgbClr val="44546A"/>
+      </a:dk2>
+      <a:lt2>
+        <a:srgbClr val="E7E6E6"/>
+      </a:lt2>
+      <a:accent1>
+        <a:srgbClr val="1F4E79"/>
+      </a:accent1>
+      <a:accent2>
+        <a:srgbClr val="2E7D8A"/>
+      </a:accent2>
+      <a:accent3>
+        <a:srgbClr val="F0BE50"/>
+      </a:accent3>
+      <a:accent4>
+        <a:srgbClr val="4A5568"/>
+      </a:accent4>
+      <a:accent5>
+        <a:srgbClr val="9C4221"/>
+      </a:accent5>
+      <a:accent6>
+        <a:srgbClr val="1A1A1A"/>
+      </a:accent6>
+      <a:hlink>
+        <a:srgbClr val="0563C1"/>
+      </a:hlink>
+      <a:folHlink>
+        <a:srgbClr val="954F72"/>
+      </a:folHlink>
+    </a:clrScheme>
+    <a:fontScheme name="Office">
+      <a:majorFont>
+        <a:latin typeface="Segoe UI Semibold" panose="020F0302020204030204"/>
+        <a:ea typeface=""/>
+        <a:cs typeface=""/>
+        <a:font script="Jpan" typeface="ＭＳ Ｐゴシック"/>
+        <a:font script="Hang" typeface="맑은 고딕"/>
+        <a:font script="Hans" typeface="宋体"/>
+        <a:font script="Hant" typeface="新細明體"/>
+        <a:font script="Arab" typeface="Times New Roman"/>
+        <a:font script="Hebr" typeface="Times New Roman"/>
+        <a:font script="Thai" typeface="Angsana New"/>
+        <a:font script="Ethi" typeface="Nyala"/>
+        <a:font script="Beng" typeface="Vrinda"/>
+        <a:font script="Gujr" typeface="Shruti"/>
+        <a:font script="Khmr" typeface="MoolBoran"/>
+        <a:font script="Knda" typeface="Tunga"/>
+        <a:font script="Guru" typeface="Raavi"/>
+        <a:font script="Cans" typeface="Euphemia"/>
+        <a:font script="Cher" typeface="Plantagenet Cherokee"/>
+        <a:font script="Yiii" typeface="Microsoft Yi Baiti"/>
+        <a:font script="Tibt" typeface="Microsoft Himalaya"/>
+        <a:font script="Thaa" typeface="MV Boli"/>
+        <a:font script="Deva" typeface="Mangal"/>
+        <a:font script="Telu" typeface="Gautami"/>
+        <a:font script="Taml" typeface="Latha"/>
+        <a:font script="Syrc" typeface="Estrangelo Edessa"/>
+        <a:font script="Orya" typeface="Kalinga"/>
+        <a:font script="Mlym" typeface="Kartika"/>
+        <a:font script="Laoo" typeface="DokChampa"/>
+        <a:font script="Sinh" typeface="Iskoola Pota"/>
+        <a:font script="Mong" typeface="Mongolian Baiti"/>
+        <a:font script="Viet" typeface="Times New Roman"/>
+        <a:font script="Uigh" typeface="Microsoft Uighur"/>
+        <a:font script="Geor" typeface="Sylfaen"/>
+      </a:majorFont>
+      <a:minorFont>
+        <a:latin typeface="Segoe UI" panose="020F0502020204030204"/>
+        <a:ea typeface=""/>
+        <a:cs typeface=""/>
+        <a:font script="Jpan" typeface="ＭＳ Ｐゴシック"/>
+        <a:font script="Hang" typeface="맑은 고딕"/>
+        <a:font script="Hans" typeface="宋体"/>
+        <a:font script="Hant" typeface="新細明體"/>
+        <a:font script="Arab" typeface="Arial"/>
+        <a:font script="Hebr" typeface="Arial"/>
+        <a:font script="Thai" typeface="Cordia New"/>
+        <a:font script="Ethi" typeface="Nyala"/>
+        <a:font script="Beng" typeface="Vrinda"/>
+        <a:font script="Gujr" typeface="Shruti"/>
+        <a:font script="Khmr" typeface="DaunPenh"/>
+        <a:font script="Knda" typeface="Tunga"/>
+        <a:font script="Guru" typeface="Raavi"/>
+        <a:font script="Cans" typeface="Euphemia"/>
+        <a:font script="Cher" typeface="Plantagenet Cherokee"/>
+        <a:font script="Yiii" typeface="Microsoft Yi Baiti"/>
+        <a:font script="Tibt" typeface="Microsoft Himalaya"/>
+        <a:font script="Thaa" typeface="MV Boli"/>
+        <a:font script="Deva" typeface="Mangal"/>
+        <a:font script="Telu" typeface="Gautami"/>
+        <a:font script="Taml" typeface="Latha"/>
+        <a:font script="Syrc" typeface="Estrangelo Edessa"/>
+        <a:font script="Orya" typeface="Kalinga"/>
+        <a:font script="Mlym" typeface="Kartika"/>
+        <a:font script="Laoo" typeface="DokChampa"/>
+        <a:font script="Sinh" typeface="Iskoola Pota"/>
+        <a:font script="Mong" typeface="Mongolian Baiti"/>
+        <a:font script="Viet" typeface="Arial"/>
+        <a:font script="Uigh" typeface="Microsoft Uighur"/>
+        <a:font script="Geor" typeface="Sylfaen"/>
+      </a:minorFont>
+    </a:fontScheme>
+    <a:fmtScheme name="Office">
+      <a:fillStyleLst>
+        <a:solidFill>
+          <a:schemeClr val="phClr"/>
+        </a:solidFill>
+        <a:gradFill rotWithShape="1">
+          <a:gsLst>
+            <a:gs pos="0">
+              <a:schemeClr val="phClr">
+                <a:lumMod val="110000"/>
+                <a:satMod val="105000"/>
+                <a:tint val="67000"/>
+              </a:schemeClr>
+            </a:gs>
+            <a:gs pos="50000">
+              <a:schemeClr val="phClr">
+                <a:lumMod val="105000"/>
+                <a:satMod val="103000"/>
+                <a:tint val="73000"/>
+              </a:schemeClr>
+            </a:gs>
+            <a:gs pos="100000">
+              <a:schemeClr val="phClr">
+                <a:lumMod val="105000"/>
+                <a:satMod val="109000"/>
+                <a:tint val="81000"/>
+              </a:schemeClr>
+            </a:gs>
+          </a:gsLst>
+          <a:lin ang="5400000" scaled="0"/>
+        </a:gradFill>
+        <a:gradFill rotWithShape="1">
+          <a:gsLst>
+            <a:gs pos="0">
+              <a:schemeClr val="phClr">
+                <a:satMod val="103000"/>
+                <a:lumMod val="102000"/>
+                <a:tint val="94000"/>
+              </a:schemeClr>
+            </a:gs>
+            <a:gs pos="50000">
+              <a:schemeClr val="phClr">
+                <a:satMod val="110000"/>
+                <a:lumMod val="100000"/>
+                <a:shade val="100000"/>
+              </a:schemeClr>
+            </a:gs>
+            <a:gs pos="100000">
+              <a:schemeClr val="phClr">
+                <a:lumMod val="99000"/>
+                <a:satMod val="120000"/>
+                <a:shade val="78000"/>
+              </a:schemeClr>
+            </a:gs>
+          </a:gsLst>
+          <a:lin ang="5400000" scaled="0"/>
+        </a:gradFill>
+      </a:fillStyleLst>
+      <a:lnStyleLst>
+        <a:ln w="6350" cap="flat" cmpd="sng" algn="ctr">
+          <a:solidFill>
+            <a:schemeClr val="phClr"/>
+          </a:solidFill>
+          <a:prstDash val="solid"/>
+          <a:miter lim="800000"/>
+        </a:ln>
+        <a:ln w="12700" cap="flat" cmpd="sng" algn="ctr">
+          <a:solidFill>
+            <a:schemeClr val="phClr"/>
+          </a:solidFill>
+          <a:prstDash val="solid"/>
+          <a:miter lim="800000"/>
+        </a:ln>
+        <a:ln w="19050" cap="flat" cmpd="sng" algn="ctr">
+          <a:solidFill>
+            <a:schemeClr val="phClr"/>
+          </a:solidFill>
+          <a:prstDash val="solid"/>
+          <a:miter lim="800000"/>
+        </a:ln>
+      </a:lnStyleLst>
+      <a:effectStyleLst>
+        <a:effectStyle>
+          <a:effectLst/>
+        </a:effectStyle>
+        <a:effectStyle>
+          <a:effectLst/>
+        </a:effectStyle>
+        <a:effectStyle>
+          <a:effectLst>
+            <a:outerShdw blurRad="57150" dist="19050" dir="5400000" algn="ctr" rotWithShape="0">
+              <a:srgbClr val="000000">
+                <a:alpha val="63000"/>
+              </a:srgbClr>
+            </a:outerShdw>
+          </a:effectLst>
+        </a:effectStyle>
+      </a:effectStyleLst>
+      <a:bgFillStyleLst>
+        <a:solidFill>
+          <a:schemeClr val="phClr"/>
+        </a:solidFill>
+        <a:solidFill>
+          <a:schemeClr val="phClr">
+            <a:tint val="95000"/>
+            <a:satMod val="170000"/>
+          </a:schemeClr>
+        </a:solidFill>
+        <a:gradFill rotWithShape="1">
+          <a:gsLst>
+            <a:gs pos="0">
+              <a:schemeClr val="phClr">
+                <a:tint val="93000"/>
+                <a:satMod val="150000"/>
+                <a:shade val="98000"/>
+                <a:lumMod val="102000"/>
+              </a:schemeClr>
+            </a:gs>
+            <a:gs pos="50000">
+              <a:schemeClr val="phClr">
+                <a:tint val="98000"/>
+                <a:satMod val="130000"/>
+                <a:shade val="90000"/>
+                <a:lumMod val="103000"/>
+              </a:schemeClr>
+            </a:gs>
+            <a:gs pos="100000">
+              <a:schemeClr val="phClr">
+                <a:shade val="63000"/>
+                <a:satMod val="120000"/>
+              </a:schemeClr>
+            </a:gs>
+          </a:gsLst>
+          <a:lin ang="5400000" scaled="0"/>
+        </a:gradFill>
+      </a:bgFillStyleLst>
+    </a:fmtScheme>
+  </a:themeElements>
+  <a:objectDefaults/>
+  <a:extraClrSchemeLst/>
+  <a:extLst>
+    <a:ext uri="{05A4C25C-085E-4340-85A3-A5531E510DB2}">
+      <thm15:themeFamily xmlns:thm15="http://schemas.microsoft.com/office/thememl/2012/main" name="Office Theme" id="{62F939B6-93AF-4DB8-9C6B-D6C7DFDC589F}" vid="{4A3C46E8-61CC-4603-A589-7422A47A8E4A}"/>
+    </a:ext>
+  </a:extLst>
+</a:theme>
 </file>
--- a/Course/slides_syntax_example.pptx
+++ b/Course/slides_syntax_example.pptx
@@ -591,7 +591,7 @@
 </file>
 
 <file path=ppt/slideLayouts/slideLayout1.xml><?xml version="1.0" encoding="utf-8"?>
-<p:sldLayout xmlns:a="http://schemas.openxmlformats.org/drawingml/2006/main" xmlns:r="http://schemas.openxmlformats.org/officeDocument/2006/relationships" xmlns:p="http://schemas.openxmlformats.org/presentationml/2006/main" type="title" preserve="1">
+<p:sldLayout xmlns:a="http://schemas.openxmlformats.org/drawingml/2006/main" xmlns:r="http://schemas.openxmlformats.org/officeDocument/2006/relationships" xmlns:p="http://schemas.openxmlformats.org/presentationml/2006/main" type="title" preserve="1" showMasterSp="0">
   <p:cSld name="Title Slide">
     <p:spTree>
       <p:nvGrpSpPr>
@@ -3292,7 +3292,7 @@
       </p:sp>
       <p:pic>
         <p:nvPicPr>
-          <p:cNvPr descr="univaq_logo.png" id="2147483660" name="Logo 2147483660"/>
+          <p:cNvPr descr="univaq_logo.png" id="7" name="Logo 7"/>
           <p:cNvPicPr>
             <a:picLocks noChangeAspect="1"/>
           </p:cNvPicPr>

--- a/Course/slides_syntax_example.pptx
+++ b/Course/slides_syntax_example.pptx
@@ -5,7 +5,7 @@
     <p:sldMasterId id="2147483648" r:id="rId1"/>
   </p:sldMasterIdLst>
   <p:notesMasterIdLst>
-    <p:notesMasterId r:id="rId12"/>
+    <p:notesMasterId r:id="rId11"/>
   </p:notesMasterIdLst>
   <p:sldIdLst>
     <p:sldId id="256" r:id="rId2"/>
@@ -17,7 +17,6 @@
     <p:sldId id="262" r:id="rId8"/>
     <p:sldId id="263" r:id="rId9"/>
     <p:sldId id="264" r:id="rId10"/>
-    <p:sldId id="265" r:id="rId11"/>
   </p:sldIdLst>
   <p:sldSz cx="9144000" cy="5143500" type="screen16x9"/>
   <p:notesSz cx="6858000" cy="9144000"/>
@@ -580,6 +579,88 @@
             <a:fld id="{18BDFEC3-8487-43E8-A154-7C12CBC1FFF2}" type="slidenum">
               <a:rPr lang="en-US"/>
               <a:t>3</a:t>
+            </a:fld>
+            <a:endParaRPr lang="en-US"/>
+          </a:p>
+        </p:txBody>
+      </p:sp>
+    </p:spTree>
+  </p:cSld>
+</p:notes>
+</file>
+
+<file path=ppt/notesSlides/notesSlide2.xml><?xml version="1.0" encoding="utf-8"?>
+<p:notes xmlns:a="http://schemas.openxmlformats.org/drawingml/2006/main" xmlns:r="http://schemas.openxmlformats.org/officeDocument/2006/relationships" xmlns:p="http://schemas.openxmlformats.org/presentationml/2006/main">
+  <p:cSld>
+    <p:spTree>
+      <p:nvGrpSpPr>
+        <p:cNvPr id="1" name=""/>
+        <p:cNvGrpSpPr/>
+        <p:nvPr/>
+      </p:nvGrpSpPr>
+      <p:grpSpPr>
+        <a:xfrm>
+          <a:off x="0" y="0"/>
+          <a:ext cx="0" cy="0"/>
+          <a:chOff x="0" y="0"/>
+          <a:chExt cx="0" cy="0"/>
+        </a:xfrm>
+      </p:grpSpPr>
+      <p:sp>
+        <p:nvSpPr>
+          <p:cNvPr id="2" name="Slide Image Placeholder 1"/>
+          <p:cNvSpPr>
+            <a:spLocks noGrp="1" noRot="1" noChangeAspect="1"/>
+          </p:cNvSpPr>
+          <p:nvPr>
+            <p:ph type="sldImg"/>
+          </p:nvPr>
+        </p:nvSpPr>
+        <p:spPr/>
+      </p:sp>
+      <p:sp>
+        <p:nvSpPr>
+          <p:cNvPr id="3" name="Notes Placeholder 2"/>
+          <p:cNvSpPr>
+            <a:spLocks noGrp="1"/>
+          </p:cNvSpPr>
+          <p:nvPr>
+            <p:ph type="body" idx="1"/>
+          </p:nvPr>
+        </p:nvSpPr>
+        <p:spPr/>
+        <p:txBody>
+          <a:bodyPr/>
+          <a:lstStyle/>
+          <a:p>
+            <a:pPr lvl="0" indent="0" marL="0">
+              <a:buNone/>
+            </a:pPr>
+            <a:r>
+              <a:rPr/>
+              <a:t>Display maths must be the last thing on its slide: pandoc treats a block image as the end of the slide, so any text after it lands on a new untitled one. The build warns if you get this wrong.</a:t>
+            </a:r>
+          </a:p>
+        </p:txBody>
+      </p:sp>
+      <p:sp>
+        <p:nvSpPr>
+          <p:cNvPr id="4" name="Slide Number Placeholder 3"/>
+          <p:cNvSpPr>
+            <a:spLocks noGrp="1"/>
+          </p:cNvSpPr>
+          <p:nvPr>
+            <p:ph type="sldNum" sz="quarter" idx="10"/>
+          </p:nvPr>
+        </p:nvSpPr>
+        <p:spPr/>
+        <p:txBody>
+          <a:bodyPr/>
+          <a:lstStyle/>
+          <a:p>
+            <a:fld id="{18BDFEC3-8487-43E8-A154-7C12CBC1FFF2}" type="slidenum">
+              <a:rPr lang="en-US"/>
+              <a:t>5</a:t>
             </a:fld>
             <a:endParaRPr lang="en-US"/>
           </a:p>
@@ -3706,100 +3787,6 @@
 </p:sld>
 </file>
 
-<file path=ppt/slides/slide10.xml><?xml version="1.0" encoding="utf-8"?>
-<p:sld xmlns:a="http://schemas.openxmlformats.org/drawingml/2006/main" xmlns:r="http://schemas.openxmlformats.org/officeDocument/2006/relationships" xmlns:p="http://schemas.openxmlformats.org/presentationml/2006/main">
-  <p:cSld>
-    <p:spTree>
-      <p:nvGrpSpPr>
-        <p:cNvPr id="1" name=""/>
-        <p:cNvGrpSpPr/>
-        <p:nvPr/>
-      </p:nvGrpSpPr>
-      <p:grpSpPr>
-        <a:xfrm>
-          <a:off x="0" y="0"/>
-          <a:ext cx="0" cy="0"/>
-          <a:chOff x="0" y="0"/>
-          <a:chExt cx="0" cy="0"/>
-        </a:xfrm>
-      </p:grpSpPr>
-      <p:sp>
-        <p:nvSpPr>
-          <p:cNvPr id="2" name="Title 1"/>
-          <p:cNvSpPr>
-            <a:spLocks noGrp="1"/>
-          </p:cNvSpPr>
-          <p:nvPr>
-            <p:ph type="title"/>
-          </p:nvPr>
-        </p:nvSpPr>
-        <p:spPr>
-          <a:xfrm>
-            <a:off x="457200" y="205979"/>
-            <a:ext cx="8229600" cy="857250"/>
-          </a:xfrm>
-        </p:spPr>
-        <p:txBody>
-          <a:bodyPr/>
-          <a:lstStyle/>
-          <a:p>
-            <a:pPr lvl="0" indent="0" marL="0">
-              <a:buNone/>
-            </a:pPr>
-            <a:r>
-              <a:rPr/>
-              <a:t>Summary</a:t>
-            </a:r>
-          </a:p>
-        </p:txBody>
-      </p:sp>
-      <p:sp>
-        <p:nvSpPr>
-          <p:cNvPr id="3" name="Content Placeholder 2"/>
-          <p:cNvSpPr>
-            <a:spLocks noGrp="1"/>
-          </p:cNvSpPr>
-          <p:nvPr>
-            <p:ph idx="1"/>
-          </p:nvPr>
-        </p:nvSpPr>
-        <p:spPr>
-          <a:xfrm>
-            <a:off x="457200" y="1200151"/>
-            <a:ext cx="8229600" cy="3394472"/>
-          </a:xfrm>
-        </p:spPr>
-        <p:txBody>
-          <a:bodyPr/>
-          <a:lstStyle/>
-          <a:p>
-            <a:pPr lvl="0"/>
-            <a:r>
-              <a:rPr/>
-              <a:t>Regression predicts a continuous target</a:t>
-            </a:r>
-          </a:p>
-          <a:p>
-            <a:pPr lvl="0"/>
-            <a:r>
-              <a:rPr/>
-              <a:t>MSE is the standard cost function</a:t>
-            </a:r>
-          </a:p>
-          <a:p>
-            <a:pPr lvl="0"/>
-            <a:r>
-              <a:rPr/>
-              <a:t>Gradient descent scales where the normal equation does not</a:t>
-            </a:r>
-          </a:p>
-        </p:txBody>
-      </p:sp>
-    </p:spTree>
-  </p:cSld>
-</p:sld>
-</file>
-
 <file path=ppt/slides/slide2.xml><?xml version="1.0" encoding="utf-8"?>
 <p:sld xmlns:a="http://schemas.openxmlformats.org/drawingml/2006/main" xmlns:r="http://schemas.openxmlformats.org/officeDocument/2006/relationships" xmlns:p="http://schemas.openxmlformats.org/presentationml/2006/main">
   <p:cSld>
@@ -4204,7 +4191,7 @@
             </a:pPr>
             <a:r>
               <a:rPr/>
-              <a:t>The mean squared error over m examples:</a:t>
+              <a:t>The mean squared error over m examples, where the factor ½ is there to simplify the derivative:</a:t>
             </a:r>
           </a:p>
         </p:txBody>
@@ -4218,7 +4205,7 @@
           <p:nvPr/>
         </p:nvPicPr>
         <p:blipFill>
-          <a:blip r:embed="rId2"/>
+          <a:blip r:embed="rId3"/>
           <a:stretch>
             <a:fillRect/>
           </a:stretch>
@@ -4245,58 +4232,6 @@
 </file>
 
 <file path=ppt/slides/slide6.xml><?xml version="1.0" encoding="utf-8"?>
-<p:sld xmlns:a="http://schemas.openxmlformats.org/drawingml/2006/main" xmlns:r="http://schemas.openxmlformats.org/officeDocument/2006/relationships" xmlns:p="http://schemas.openxmlformats.org/presentationml/2006/main">
-  <p:cSld>
-    <p:spTree>
-      <p:nvGrpSpPr>
-        <p:cNvPr id="1" name=""/>
-        <p:cNvGrpSpPr/>
-        <p:nvPr/>
-      </p:nvGrpSpPr>
-      <p:grpSpPr>
-        <a:xfrm>
-          <a:off x="0" y="0"/>
-          <a:ext cx="0" cy="0"/>
-          <a:chOff x="0" y="0"/>
-          <a:chExt cx="0" cy="0"/>
-        </a:xfrm>
-      </p:grpSpPr>
-      <p:sp>
-        <p:nvSpPr>
-          <p:cNvPr id="3" name="Content Placeholder 2"/>
-          <p:cNvSpPr>
-            <a:spLocks noGrp="1"/>
-          </p:cNvSpPr>
-          <p:nvPr>
-            <p:ph idx="1"/>
-          </p:nvPr>
-        </p:nvSpPr>
-        <p:spPr>
-          <a:xfrm>
-            <a:off x="457200" y="1200151"/>
-            <a:ext cx="8229600" cy="3394472"/>
-          </a:xfrm>
-        </p:spPr>
-        <p:txBody>
-          <a:bodyPr/>
-          <a:lstStyle/>
-          <a:p>
-            <a:pPr lvl="0" indent="0" marL="0">
-              <a:buNone/>
-            </a:pPr>
-            <a:r>
-              <a:rPr/>
-              <a:t>The factor  simplifies the derivative.</a:t>
-            </a:r>
-          </a:p>
-        </p:txBody>
-      </p:sp>
-    </p:spTree>
-  </p:cSld>
-</p:sld>
-</file>
-
-<file path=ppt/slides/slide7.xml><?xml version="1.0" encoding="utf-8"?>
 <p:sld xmlns:a="http://schemas.openxmlformats.org/drawingml/2006/main" xmlns:r="http://schemas.openxmlformats.org/officeDocument/2006/relationships" xmlns:p="http://schemas.openxmlformats.org/presentationml/2006/main">
   <p:cSld>
     <p:spTree>
@@ -4630,6 +4565,160 @@
 </p:sld>
 </file>
 
+<file path=ppt/slides/slide7.xml><?xml version="1.0" encoding="utf-8"?>
+<p:sld xmlns:a="http://schemas.openxmlformats.org/drawingml/2006/main" xmlns:r="http://schemas.openxmlformats.org/officeDocument/2006/relationships" xmlns:p="http://schemas.openxmlformats.org/presentationml/2006/main">
+  <p:cSld>
+    <p:spTree>
+      <p:nvGrpSpPr>
+        <p:cNvPr id="1" name=""/>
+        <p:cNvGrpSpPr/>
+        <p:nvPr/>
+      </p:nvGrpSpPr>
+      <p:grpSpPr>
+        <a:xfrm>
+          <a:off x="0" y="0"/>
+          <a:ext cx="0" cy="0"/>
+          <a:chOff x="0" y="0"/>
+          <a:chExt cx="0" cy="0"/>
+        </a:xfrm>
+      </p:grpSpPr>
+      <p:sp>
+        <p:nvSpPr>
+          <p:cNvPr id="2" name="Title 1"/>
+          <p:cNvSpPr>
+            <a:spLocks noGrp="1"/>
+          </p:cNvSpPr>
+          <p:nvPr>
+            <p:ph type="title"/>
+          </p:nvPr>
+        </p:nvSpPr>
+        <p:spPr>
+          <a:xfrm>
+            <a:off x="457200" y="205979"/>
+            <a:ext cx="8229600" cy="857250"/>
+          </a:xfrm>
+        </p:spPr>
+        <p:txBody>
+          <a:bodyPr/>
+          <a:lstStyle/>
+          <a:p>
+            <a:pPr lvl="0" indent="0" marL="0">
+              <a:buNone/>
+            </a:pPr>
+            <a:r>
+              <a:rPr/>
+              <a:t>Implementation</a:t>
+            </a:r>
+          </a:p>
+        </p:txBody>
+      </p:sp>
+      <p:sp>
+        <p:nvSpPr>
+          <p:cNvPr id="3" name="Content Placeholder 2"/>
+          <p:cNvSpPr>
+            <a:spLocks noGrp="1"/>
+          </p:cNvSpPr>
+          <p:nvPr>
+            <p:ph idx="1"/>
+          </p:nvPr>
+        </p:nvSpPr>
+        <p:spPr>
+          <a:xfrm>
+            <a:off x="457200" y="1200151"/>
+            <a:ext cx="8229600" cy="3394472"/>
+          </a:xfrm>
+        </p:spPr>
+        <p:txBody>
+          <a:bodyPr/>
+          <a:lstStyle/>
+          <a:p>
+            <a:pPr lvl="0" indent="0">
+              <a:buNone/>
+            </a:pPr>
+            <a:r>
+              <a:rPr b="1">
+                <a:solidFill>
+                  <a:srgbClr val="008000"/>
+                </a:solidFill>
+                <a:latin typeface="Courier"/>
+              </a:rPr>
+              <a:t>from</a:t>
+            </a:r>
+            <a:r>
+              <a:rPr>
+                <a:latin typeface="Courier"/>
+              </a:rPr>
+              <a:t> sklearn.linear_model </a:t>
+            </a:r>
+            <a:r>
+              <a:rPr b="1">
+                <a:solidFill>
+                  <a:srgbClr val="008000"/>
+                </a:solidFill>
+                <a:latin typeface="Courier"/>
+              </a:rPr>
+              <a:t>import</a:t>
+            </a:r>
+            <a:r>
+              <a:rPr>
+                <a:latin typeface="Courier"/>
+              </a:rPr>
+              <a:t> LinearRegression</a:t>
+            </a:r>
+            <a:br/>
+            <a:br/>
+            <a:r>
+              <a:rPr>
+                <a:latin typeface="Courier"/>
+              </a:rPr>
+              <a:t>model </a:t>
+            </a:r>
+            <a:r>
+              <a:rPr>
+                <a:solidFill>
+                  <a:srgbClr val="666666"/>
+                </a:solidFill>
+                <a:latin typeface="Courier"/>
+              </a:rPr>
+              <a:t>=</a:t>
+            </a:r>
+            <a:r>
+              <a:rPr>
+                <a:latin typeface="Courier"/>
+              </a:rPr>
+              <a:t> LinearRegression()</a:t>
+            </a:r>
+            <a:br/>
+            <a:r>
+              <a:rPr>
+                <a:latin typeface="Courier"/>
+              </a:rPr>
+              <a:t>model.fit(X_train, y_train)</a:t>
+            </a:r>
+            <a:br/>
+            <a:r>
+              <a:rPr>
+                <a:solidFill>
+                  <a:srgbClr val="008000"/>
+                </a:solidFill>
+                <a:latin typeface="Courier"/>
+              </a:rPr>
+              <a:t>print</a:t>
+            </a:r>
+            <a:r>
+              <a:rPr>
+                <a:latin typeface="Courier"/>
+              </a:rPr>
+              <a:t>(model.coef_, model.intercept_)</a:t>
+            </a:r>
+          </a:p>
+        </p:txBody>
+      </p:sp>
+    </p:spTree>
+  </p:cSld>
+</p:sld>
+</file>
+
 <file path=ppt/slides/slide8.xml><?xml version="1.0" encoding="utf-8"?>
 <p:sld xmlns:a="http://schemas.openxmlformats.org/drawingml/2006/main" xmlns:r="http://schemas.openxmlformats.org/officeDocument/2006/relationships" xmlns:p="http://schemas.openxmlformats.org/presentationml/2006/main">
   <p:cSld>
@@ -4672,7 +4761,7 @@
             </a:pPr>
             <a:r>
               <a:rPr/>
-              <a:t>Implementation</a:t>
+              <a:t>Two-column layout</a:t>
             </a:r>
           </a:p>
         </p:txBody>
@@ -4684,97 +4773,83 @@
             <a:spLocks noGrp="1"/>
           </p:cNvSpPr>
           <p:nvPr>
-            <p:ph idx="1"/>
+            <p:ph idx="1" sz="half"/>
           </p:nvPr>
         </p:nvSpPr>
         <p:spPr>
           <a:xfrm>
             <a:off x="457200" y="1200151"/>
-            <a:ext cx="8229600" cy="3394472"/>
+            <a:ext cx="4038600" cy="3394472"/>
           </a:xfrm>
         </p:spPr>
         <p:txBody>
           <a:bodyPr/>
           <a:lstStyle/>
           <a:p>
-            <a:pPr lvl="0" indent="0">
+            <a:pPr lvl="0" indent="0" marL="0">
               <a:buNone/>
             </a:pPr>
             <a:r>
-              <a:rPr b="1">
-                <a:solidFill>
-                  <a:srgbClr val="008000"/>
-                </a:solidFill>
-                <a:latin typeface="Courier"/>
-              </a:rPr>
-              <a:t>from</a:t>
-            </a:r>
-            <a:r>
-              <a:rPr>
-                <a:latin typeface="Courier"/>
-              </a:rPr>
-              <a:t> sklearn.linear_model </a:t>
-            </a:r>
-            <a:r>
-              <a:rPr b="1">
-                <a:solidFill>
-                  <a:srgbClr val="008000"/>
-                </a:solidFill>
-                <a:latin typeface="Courier"/>
-              </a:rPr>
-              <a:t>import</a:t>
-            </a:r>
-            <a:r>
-              <a:rPr>
-                <a:latin typeface="Courier"/>
-              </a:rPr>
-              <a:t> LinearRegression</a:t>
-            </a:r>
-            <a:br/>
-            <a:br/>
-            <a:r>
-              <a:rPr>
-                <a:latin typeface="Courier"/>
-              </a:rPr>
-              <a:t>model </a:t>
-            </a:r>
-            <a:r>
-              <a:rPr>
-                <a:solidFill>
-                  <a:srgbClr val="666666"/>
-                </a:solidFill>
-                <a:latin typeface="Courier"/>
-              </a:rPr>
-              <a:t>=</a:t>
-            </a:r>
-            <a:r>
-              <a:rPr>
-                <a:latin typeface="Courier"/>
-              </a:rPr>
-              <a:t> LinearRegression()</a:t>
-            </a:r>
-            <a:br/>
-            <a:r>
-              <a:rPr>
-                <a:latin typeface="Courier"/>
-              </a:rPr>
-              <a:t>model.fit(X_train, y_train)</a:t>
-            </a:r>
-            <a:br/>
-            <a:r>
-              <a:rPr>
-                <a:solidFill>
-                  <a:srgbClr val="008000"/>
-                </a:solidFill>
-                <a:latin typeface="Courier"/>
-              </a:rPr>
-              <a:t>print</a:t>
-            </a:r>
-            <a:r>
-              <a:rPr>
-                <a:latin typeface="Courier"/>
-              </a:rPr>
-              <a:t>(model.coef_, model.intercept_)</a:t>
+              <a:rPr b="1"/>
+              <a:t>Underfitting</a:t>
+            </a:r>
+          </a:p>
+          <a:p>
+            <a:pPr lvl="0"/>
+            <a:r>
+              <a:rPr/>
+              <a:t>High bias</a:t>
+            </a:r>
+          </a:p>
+          <a:p>
+            <a:pPr lvl="0"/>
+            <a:r>
+              <a:rPr/>
+              <a:t>Poor on train and test</a:t>
+            </a:r>
+          </a:p>
+        </p:txBody>
+      </p:sp>
+      <p:sp>
+        <p:nvSpPr>
+          <p:cNvPr id="4" name="Content Placeholder 3"/>
+          <p:cNvSpPr>
+            <a:spLocks noGrp="1"/>
+          </p:cNvSpPr>
+          <p:nvPr>
+            <p:ph idx="2" sz="half"/>
+          </p:nvPr>
+        </p:nvSpPr>
+        <p:spPr>
+          <a:xfrm>
+            <a:off x="4648200" y="1200151"/>
+            <a:ext cx="4038600" cy="3394472"/>
+          </a:xfrm>
+        </p:spPr>
+        <p:txBody>
+          <a:bodyPr/>
+          <a:lstStyle/>
+          <a:p>
+            <a:pPr lvl="0" indent="0" marL="0">
+              <a:buNone/>
+            </a:pPr>
+            <a:r>
+              <a:rPr b="1"/>
+              <a:t>Overfitting</a:t>
+            </a:r>
+          </a:p>
+          <a:p>
+            <a:pPr lvl="0"/>
+            <a:r>
+              <a:rPr/>
+              <a:t>High variance</a:t>
+            </a:r>
+          </a:p>
+          <a:p>
+            <a:pPr lvl="0"/>
+            <a:r>
+              <a:rPr/>
+              <a:t>Great on train, poor on test</a:t>
             </a:r>
           </a:p>
         </p:txBody>
@@ -4826,7 +4901,7 @@
             </a:pPr>
             <a:r>
               <a:rPr/>
-              <a:t>Two-column layout</a:t>
+              <a:t>Summary</a:t>
             </a:r>
           </a:p>
         </p:txBody>
@@ -4838,83 +4913,37 @@
             <a:spLocks noGrp="1"/>
           </p:cNvSpPr>
           <p:nvPr>
-            <p:ph idx="1" sz="half"/>
+            <p:ph idx="1"/>
           </p:nvPr>
         </p:nvSpPr>
         <p:spPr>
           <a:xfrm>
             <a:off x="457200" y="1200151"/>
-            <a:ext cx="4038600" cy="3394472"/>
+            <a:ext cx="8229600" cy="3394472"/>
           </a:xfrm>
         </p:spPr>
         <p:txBody>
           <a:bodyPr/>
           <a:lstStyle/>
           <a:p>
-            <a:pPr lvl="0" indent="0" marL="0">
-              <a:buNone/>
-            </a:pPr>
-            <a:r>
-              <a:rPr b="1"/>
-              <a:t>Underfitting</a:t>
-            </a:r>
-          </a:p>
-          <a:p>
             <a:pPr lvl="0"/>
             <a:r>
               <a:rPr/>
-              <a:t>High bias</a:t>
+              <a:t>Regression predicts a continuous target</a:t>
             </a:r>
           </a:p>
           <a:p>
             <a:pPr lvl="0"/>
             <a:r>
               <a:rPr/>
-              <a:t>Poor on train and test</a:t>
-            </a:r>
-          </a:p>
-        </p:txBody>
-      </p:sp>
-      <p:sp>
-        <p:nvSpPr>
-          <p:cNvPr id="4" name="Content Placeholder 3"/>
-          <p:cNvSpPr>
-            <a:spLocks noGrp="1"/>
-          </p:cNvSpPr>
-          <p:nvPr>
-            <p:ph idx="2" sz="half"/>
-          </p:nvPr>
-        </p:nvSpPr>
-        <p:spPr>
-          <a:xfrm>
-            <a:off x="4648200" y="1200151"/>
-            <a:ext cx="4038600" cy="3394472"/>
-          </a:xfrm>
-        </p:spPr>
-        <p:txBody>
-          <a:bodyPr/>
-          <a:lstStyle/>
-          <a:p>
-            <a:pPr lvl="0" indent="0" marL="0">
-              <a:buNone/>
-            </a:pPr>
-            <a:r>
-              <a:rPr b="1"/>
-              <a:t>Overfitting</a:t>
+              <a:t>MSE is the standard cost function</a:t>
             </a:r>
           </a:p>
           <a:p>
             <a:pPr lvl="0"/>
             <a:r>
               <a:rPr/>
-              <a:t>High variance</a:t>
-            </a:r>
-          </a:p>
-          <a:p>
-            <a:pPr lvl="0"/>
-            <a:r>
-              <a:rPr/>
-              <a:t>Great on train, poor on test</a:t>
+              <a:t>Gradient descent scales where the normal equation does not</a:t>
             </a:r>
           </a:p>
         </p:txBody>
